--- a/dist/초1/수학/수와연산/초1_수학_수와연산_03_가르기와모으기_학생용.pptx
+++ b/dist/초1/수학/수와연산/초1_수학_수와연산_03_가르기와모으기_학생용.pptx
@@ -120,13 +120,13 @@
   <p:extLst>
     <p:ext uri="{521415D9-36F7-43E2-AB2F-B90AF26B5E84}">
       <p14:sectionLst xmlns:p14="http://schemas.microsoft.com/office/powerpoint/2010/main">
-        <p14:section name="도입" id="{451649d3-540d-af0e-68b9-96540d8fbe7b}">
+        <p14:section name="도입" id="{4df72ecc-e36a-32ad-5c68-ebdb6736a841}">
           <p14:sldIdLst>
             <p14:sldId id="256"/>
             <p14:sldId id="257"/>
           </p14:sldIdLst>
         </p14:section>
-        <p14:section name="개념" id="{c85b7157-0722-4ed3-a2fa-b331c6b5042a}">
+        <p14:section name="개념" id="{7d61c654-48a3-571a-29f5-26fe0d0033f9}">
           <p14:sldIdLst>
             <p14:sldId id="258"/>
             <p14:sldId id="259"/>
@@ -135,25 +135,25 @@
             <p14:sldId id="262"/>
           </p14:sldIdLst>
         </p14:section>
-        <p14:section name="연습" id="{7d72f649-82b8-fe88-9a56-5adb4916337a}">
+        <p14:section name="연습" id="{711a68d7-1765-2d42-4f5c-1848993b8526}">
           <p14:sldIdLst>
             <p14:sldId id="263"/>
             <p14:sldId id="264"/>
             <p14:sldId id="265"/>
           </p14:sldIdLst>
         </p14:section>
-        <p14:section name="확인" id="{9df8dc4e-84a6-f011-d8ce-0af157a8353f}">
+        <p14:section name="확인" id="{a1de9d88-a30b-b18a-2ff5-c62b963a18bc}">
           <p14:sldIdLst>
             <p14:sldId id="266"/>
             <p14:sldId id="267"/>
           </p14:sldIdLst>
         </p14:section>
-        <p14:section name="정리" id="{0f568872-bacf-44c4-9dc3-9478eb13297f}">
+        <p14:section name="정리" id="{4ab34a1a-04e4-b8b8-ef57-4311e96d1d3b}">
           <p14:sldIdLst>
             <p14:sldId id="268"/>
           </p14:sldIdLst>
         </p14:section>
-        <p14:section name="보충" id="{01261d52-5646-b6b0-20df-52bec80bee69}">
+        <p14:section name="보충" id="{b096471c-73b3-6aae-e3fc-a3dda9fcfa82}">
           <p14:sldIdLst>
             <p14:sldId id="269"/>
           </p14:sldIdLst>
@@ -2785,7 +2785,7 @@
           <a:bodyPr wrap="square" lIns="0" tIns="0" rIns="0" bIns="0" rtlCol="0" anchor="ctr"/>
           <a:lstStyle/>
           <a:p>
-            <a:pPr algn="l" indent="0" marL="0">
+            <a:pPr eaLnBrk="0" algn="l" indent="0" marL="0">
               <a:buNone/>
             </a:pPr>
             <a:r>
@@ -2826,7 +2826,7 @@
           <a:bodyPr wrap="square" lIns="0" tIns="0" rIns="0" bIns="0" rtlCol="0" anchor="t"/>
           <a:lstStyle/>
           <a:p>
-            <a:pPr indent="0" marL="0">
+            <a:pPr eaLnBrk="0" indent="0" marL="0">
               <a:buNone/>
             </a:pPr>
             <a:r>
@@ -3075,7 +3075,7 @@
           <a:bodyPr wrap="square" lIns="0" tIns="0" rIns="0" bIns="0" rtlCol="0" anchor="ctr"/>
           <a:lstStyle/>
           <a:p>
-            <a:pPr indent="0" marL="0">
+            <a:pPr eaLnBrk="0" indent="0" marL="0">
               <a:spcAft>
                 <a:spcPts val="600"/>
               </a:spcAft>
@@ -3095,7 +3095,7 @@
             <a:endParaRPr lang="ko-KR" sz="3200" dirty="0"/>
           </a:p>
           <a:p>
-            <a:pPr indent="0" marL="0">
+            <a:pPr eaLnBrk="0" indent="0" marL="0">
               <a:spcAft>
                 <a:spcPts val="600"/>
               </a:spcAft>
@@ -3115,7 +3115,7 @@
             <a:endParaRPr lang="ko-KR" sz="3200" dirty="0"/>
           </a:p>
           <a:p>
-            <a:pPr indent="0" marL="0">
+            <a:pPr eaLnBrk="0" indent="0" marL="0">
               <a:spcAft>
                 <a:spcPts val="600"/>
               </a:spcAft>
@@ -3184,7 +3184,7 @@
           <a:bodyPr wrap="square" lIns="0" tIns="0" rIns="0" bIns="0" rtlCol="0" anchor="ctr"/>
           <a:lstStyle/>
           <a:p>
-            <a:pPr algn="l" indent="0" marL="0">
+            <a:pPr eaLnBrk="0" algn="l" indent="0" marL="0">
               <a:buNone/>
             </a:pPr>
             <a:r>
@@ -3250,7 +3250,7 @@
           <a:bodyPr wrap="square" lIns="0" tIns="0" rIns="0" bIns="0" rtlCol="0" anchor="ctr"/>
           <a:lstStyle/>
           <a:p>
-            <a:pPr indent="0" marL="0">
+            <a:pPr eaLnBrk="0" indent="0" marL="0">
               <a:spcAft>
                 <a:spcPts val="600"/>
               </a:spcAft>
@@ -3319,7 +3319,7 @@
           <a:bodyPr wrap="square" lIns="0" tIns="0" rIns="0" bIns="0" rtlCol="0" anchor="ctr"/>
           <a:lstStyle/>
           <a:p>
-            <a:pPr indent="0" marL="0">
+            <a:pPr eaLnBrk="0" indent="0" marL="0">
               <a:spcAft>
                 <a:spcPts val="600"/>
               </a:spcAft>
@@ -3369,7 +3369,7 @@
           <a:bodyPr wrap="square" lIns="177800" tIns="0" rIns="177800" bIns="0" rtlCol="0" anchor="ctr"/>
           <a:lstStyle/>
           <a:p>
-            <a:pPr algn="l" indent="0" marL="0">
+            <a:pPr eaLnBrk="0" algn="l" indent="0" marL="0">
               <a:buNone/>
             </a:pPr>
             <a:r>
@@ -3408,7 +3408,7 @@
           <a:bodyPr wrap="square" lIns="0" tIns="0" rIns="0" bIns="0" rtlCol="0" anchor="ctr"/>
           <a:lstStyle/>
           <a:p>
-            <a:pPr algn="ctr" indent="0" marL="0">
+            <a:pPr eaLnBrk="0" algn="ctr" indent="0" marL="0">
               <a:buNone/>
             </a:pPr>
             <a:r>
@@ -3425,7 +3425,7 @@
             <a:endParaRPr lang="ko-KR" sz="3600" dirty="0"/>
           </a:p>
           <a:p>
-            <a:pPr algn="ctr" indent="0" marL="0">
+            <a:pPr eaLnBrk="0" algn="ctr" indent="0" marL="0">
               <a:buNone/>
             </a:pPr>
             <a:r>
@@ -3442,7 +3442,7 @@
             <a:endParaRPr lang="ko-KR" sz="3600" dirty="0"/>
           </a:p>
           <a:p>
-            <a:pPr algn="ctr" indent="0" marL="0">
+            <a:pPr eaLnBrk="0" algn="ctr" indent="0" marL="0">
               <a:buNone/>
             </a:pPr>
             <a:r>
@@ -3489,7 +3489,7 @@
           <a:bodyPr wrap="square" lIns="177800" tIns="0" rIns="177800" bIns="0" rtlCol="0" anchor="ctr"/>
           <a:lstStyle/>
           <a:p>
-            <a:pPr algn="l" indent="0" marL="0">
+            <a:pPr eaLnBrk="0" algn="l" indent="0" marL="0">
               <a:buNone/>
             </a:pPr>
             <a:r>
@@ -3528,7 +3528,7 @@
           <a:bodyPr wrap="square" lIns="0" tIns="0" rIns="0" bIns="0" rtlCol="0" anchor="ctr"/>
           <a:lstStyle/>
           <a:p>
-            <a:pPr algn="ctr" indent="0" marL="0">
+            <a:pPr eaLnBrk="0" algn="ctr" indent="0" marL="0">
               <a:buNone/>
             </a:pPr>
             <a:r>
@@ -3545,7 +3545,7 @@
             <a:endParaRPr lang="ko-KR" sz="3600" dirty="0"/>
           </a:p>
           <a:p>
-            <a:pPr algn="ctr" indent="0" marL="0">
+            <a:pPr eaLnBrk="0" algn="ctr" indent="0" marL="0">
               <a:buNone/>
             </a:pPr>
             <a:r>
@@ -3562,7 +3562,7 @@
             <a:endParaRPr lang="ko-KR" sz="3600" dirty="0"/>
           </a:p>
           <a:p>
-            <a:pPr algn="ctr" indent="0" marL="0">
+            <a:pPr eaLnBrk="0" algn="ctr" indent="0" marL="0">
               <a:buNone/>
             </a:pPr>
             <a:r>
@@ -3619,7 +3619,7 @@
             </a:lvl1pPr>
           </a:lstStyle>
           <a:p>
-            <a:pPr algn="r"/>
+            <a:pPr eaLnBrk="0" algn="r"/>
             <a:fld id="{F7021451-1387-4CA6-816F-3879F97B5CBC}" type="slidenum">
               <a:rPr b="0" lang="en-US"/>
               <a:t>10</a:t>
@@ -3676,7 +3676,7 @@
           <a:bodyPr wrap="square" lIns="0" tIns="0" rIns="0" bIns="0" rtlCol="0" anchor="ctr"/>
           <a:lstStyle/>
           <a:p>
-            <a:pPr algn="l" indent="0" marL="0">
+            <a:pPr eaLnBrk="0" algn="l" indent="0" marL="0">
               <a:buNone/>
             </a:pPr>
             <a:r>
@@ -3715,7 +3715,7 @@
           <a:bodyPr wrap="square" lIns="0" tIns="0" rIns="0" bIns="0" rtlCol="0" anchor="ctr"/>
           <a:lstStyle/>
           <a:p>
-            <a:pPr algn="l" indent="0" marL="0">
+            <a:pPr eaLnBrk="0" algn="l" indent="0" marL="0">
               <a:buNone/>
             </a:pPr>
             <a:r>
@@ -3762,7 +3762,7 @@
           <a:bodyPr wrap="square" lIns="0" tIns="0" rIns="0" bIns="0" rtlCol="0" anchor="ctr"/>
           <a:lstStyle/>
           <a:p>
-            <a:pPr algn="ctr" indent="0" marL="0">
+            <a:pPr eaLnBrk="0" algn="ctr" indent="0" marL="0">
               <a:buNone/>
             </a:pPr>
             <a:r>
@@ -3801,7 +3801,7 @@
           <a:bodyPr wrap="square" lIns="0" tIns="0" rIns="0" bIns="0" rtlCol="0" anchor="ctr"/>
           <a:lstStyle/>
           <a:p>
-            <a:pPr algn="l" indent="0" marL="0">
+            <a:pPr eaLnBrk="0" algn="l" indent="0" marL="0">
               <a:buNone/>
             </a:pPr>
             <a:r>
@@ -3848,7 +3848,7 @@
           <a:bodyPr wrap="square" lIns="0" tIns="0" rIns="0" bIns="0" rtlCol="0" anchor="ctr"/>
           <a:lstStyle/>
           <a:p>
-            <a:pPr algn="ctr" indent="0" marL="0">
+            <a:pPr eaLnBrk="0" algn="ctr" indent="0" marL="0">
               <a:buNone/>
             </a:pPr>
             <a:r>
@@ -3887,7 +3887,7 @@
           <a:bodyPr wrap="square" lIns="0" tIns="0" rIns="0" bIns="0" rtlCol="0" anchor="ctr"/>
           <a:lstStyle/>
           <a:p>
-            <a:pPr algn="l" indent="0" marL="0">
+            <a:pPr eaLnBrk="0" algn="l" indent="0" marL="0">
               <a:buNone/>
             </a:pPr>
             <a:r>
@@ -3934,7 +3934,7 @@
           <a:bodyPr wrap="square" lIns="0" tIns="0" rIns="0" bIns="0" rtlCol="0" anchor="ctr"/>
           <a:lstStyle/>
           <a:p>
-            <a:pPr algn="ctr" indent="0" marL="0">
+            <a:pPr eaLnBrk="0" algn="ctr" indent="0" marL="0">
               <a:buNone/>
             </a:pPr>
             <a:r>
@@ -3973,7 +3973,7 @@
           <a:bodyPr wrap="square" lIns="0" tIns="0" rIns="0" bIns="0" rtlCol="0" anchor="ctr"/>
           <a:lstStyle/>
           <a:p>
-            <a:pPr algn="l" indent="0" marL="0">
+            <a:pPr eaLnBrk="0" algn="l" indent="0" marL="0">
               <a:buNone/>
             </a:pPr>
             <a:r>
@@ -4030,7 +4030,7 @@
             </a:lvl1pPr>
           </a:lstStyle>
           <a:p>
-            <a:pPr algn="r"/>
+            <a:pPr eaLnBrk="0" algn="r"/>
             <a:fld id="{F7021451-1387-4CA6-816F-3879F97B5CBC}" type="slidenum">
               <a:rPr b="0" lang="en-US"/>
               <a:t>11</a:t>
@@ -4087,7 +4087,7 @@
           <a:bodyPr wrap="square" lIns="0" tIns="0" rIns="0" bIns="0" rtlCol="0" anchor="ctr"/>
           <a:lstStyle/>
           <a:p>
-            <a:pPr algn="l" indent="0" marL="0">
+            <a:pPr eaLnBrk="0" algn="l" indent="0" marL="0">
               <a:buNone/>
             </a:pPr>
             <a:r>
@@ -4153,7 +4153,7 @@
           <a:bodyPr wrap="square" lIns="0" tIns="0" rIns="0" bIns="0" rtlCol="0" anchor="ctr"/>
           <a:lstStyle/>
           <a:p>
-            <a:pPr indent="0" marL="0">
+            <a:pPr eaLnBrk="0" indent="0" marL="0">
               <a:spcAft>
                 <a:spcPts val="600"/>
               </a:spcAft>
@@ -4203,7 +4203,7 @@
           <a:bodyPr wrap="square" lIns="0" tIns="0" rIns="0" bIns="0" rtlCol="0" anchor="ctr"/>
           <a:lstStyle/>
           <a:p>
-            <a:pPr algn="ctr" indent="0" marL="0">
+            <a:pPr eaLnBrk="0" algn="ctr" indent="0" marL="0">
               <a:buNone/>
             </a:pPr>
             <a:r>
@@ -4269,7 +4269,7 @@
           <a:bodyPr wrap="square" lIns="0" tIns="0" rIns="0" bIns="0" rtlCol="0" anchor="ctr"/>
           <a:lstStyle/>
           <a:p>
-            <a:pPr indent="0" marL="0">
+            <a:pPr eaLnBrk="0" indent="0" marL="0">
               <a:spcAft>
                 <a:spcPts val="600"/>
               </a:spcAft>
@@ -4319,7 +4319,7 @@
           <a:bodyPr wrap="square" lIns="0" tIns="0" rIns="0" bIns="0" rtlCol="0" anchor="ctr"/>
           <a:lstStyle/>
           <a:p>
-            <a:pPr algn="ctr" indent="0" marL="0">
+            <a:pPr eaLnBrk="0" algn="ctr" indent="0" marL="0">
               <a:buNone/>
             </a:pPr>
             <a:r>
@@ -4385,7 +4385,7 @@
           <a:bodyPr wrap="square" lIns="0" tIns="0" rIns="0" bIns="0" rtlCol="0" anchor="ctr"/>
           <a:lstStyle/>
           <a:p>
-            <a:pPr indent="0" marL="0">
+            <a:pPr eaLnBrk="0" indent="0" marL="0">
               <a:spcAft>
                 <a:spcPts val="600"/>
               </a:spcAft>
@@ -4435,7 +4435,7 @@
           <a:bodyPr wrap="square" lIns="0" tIns="0" rIns="0" bIns="0" rtlCol="0" anchor="ctr"/>
           <a:lstStyle/>
           <a:p>
-            <a:pPr algn="ctr" indent="0" marL="0">
+            <a:pPr eaLnBrk="0" algn="ctr" indent="0" marL="0">
               <a:buNone/>
             </a:pPr>
             <a:r>
@@ -4501,7 +4501,7 @@
           <a:bodyPr wrap="square" lIns="0" tIns="0" rIns="0" bIns="0" rtlCol="0" anchor="ctr"/>
           <a:lstStyle/>
           <a:p>
-            <a:pPr indent="0" marL="0">
+            <a:pPr eaLnBrk="0" indent="0" marL="0">
               <a:spcAft>
                 <a:spcPts val="600"/>
               </a:spcAft>
@@ -4561,7 +4561,7 @@
             </a:lvl1pPr>
           </a:lstStyle>
           <a:p>
-            <a:pPr algn="r"/>
+            <a:pPr eaLnBrk="0" algn="r"/>
             <a:fld id="{F7021451-1387-4CA6-816F-3879F97B5CBC}" type="slidenum">
               <a:rPr b="0" lang="en-US"/>
               <a:t>12</a:t>
@@ -4618,7 +4618,7 @@
           <a:bodyPr wrap="square" lIns="0" tIns="0" rIns="0" bIns="0" rtlCol="0" anchor="ctr"/>
           <a:lstStyle/>
           <a:p>
-            <a:pPr algn="l" indent="0" marL="0">
+            <a:pPr eaLnBrk="0" algn="l" indent="0" marL="0">
               <a:buNone/>
             </a:pPr>
             <a:r>
@@ -4684,7 +4684,7 @@
           <a:bodyPr wrap="square" lIns="0" tIns="0" rIns="0" bIns="0" rtlCol="0" anchor="ctr"/>
           <a:lstStyle/>
           <a:p>
-            <a:pPr indent="0" marL="0">
+            <a:pPr eaLnBrk="0" indent="0" marL="0">
               <a:spcAft>
                 <a:spcPts val="600"/>
               </a:spcAft>
@@ -4734,7 +4734,7 @@
           <a:bodyPr wrap="square" lIns="177800" tIns="0" rIns="177800" bIns="0" rtlCol="0" anchor="ctr"/>
           <a:lstStyle/>
           <a:p>
-            <a:pPr algn="l" indent="0" marL="0">
+            <a:pPr eaLnBrk="0" algn="l" indent="0" marL="0">
               <a:buNone/>
             </a:pPr>
             <a:r>
@@ -4781,7 +4781,7 @@
           <a:bodyPr wrap="square" lIns="177800" tIns="0" rIns="177800" bIns="0" rtlCol="0" anchor="ctr"/>
           <a:lstStyle/>
           <a:p>
-            <a:pPr algn="l" indent="0" marL="0">
+            <a:pPr eaLnBrk="0" algn="l" indent="0" marL="0">
               <a:buNone/>
             </a:pPr>
             <a:r>
@@ -4820,7 +4820,7 @@
           <a:bodyPr wrap="square" lIns="0" tIns="0" rIns="0" bIns="0" rtlCol="0" anchor="t"/>
           <a:lstStyle/>
           <a:p>
-            <a:pPr algn="l" indent="0" marL="0">
+            <a:pPr eaLnBrk="0" algn="l" indent="0" marL="0">
               <a:buNone/>
             </a:pPr>
             <a:r>
@@ -4859,7 +4859,7 @@
           <a:bodyPr wrap="square" lIns="0" tIns="0" rIns="0" bIns="0" rtlCol="0" anchor="ctr"/>
           <a:lstStyle/>
           <a:p>
-            <a:pPr algn="l" indent="0" marL="0">
+            <a:pPr eaLnBrk="0" algn="l" indent="0" marL="0">
               <a:buNone/>
             </a:pPr>
             <a:r>
@@ -4898,7 +4898,7 @@
           <a:bodyPr wrap="square" lIns="0" tIns="0" rIns="0" bIns="0" rtlCol="0" anchor="ctr"/>
           <a:lstStyle/>
           <a:p>
-            <a:pPr algn="l" indent="0" marL="0">
+            <a:pPr eaLnBrk="0" algn="l" indent="0" marL="0">
               <a:buNone/>
             </a:pPr>
             <a:r>
@@ -4937,7 +4937,7 @@
           <a:bodyPr wrap="square" lIns="0" tIns="0" rIns="0" bIns="0" rtlCol="0" anchor="ctr"/>
           <a:lstStyle/>
           <a:p>
-            <a:pPr algn="l" indent="0" marL="0">
+            <a:pPr eaLnBrk="0" algn="l" indent="0" marL="0">
               <a:buNone/>
             </a:pPr>
             <a:r>
@@ -4976,7 +4976,7 @@
           <a:bodyPr wrap="square" lIns="0" tIns="0" rIns="0" bIns="0" rtlCol="0" anchor="ctr"/>
           <a:lstStyle/>
           <a:p>
-            <a:pPr algn="l" indent="0" marL="0">
+            <a:pPr eaLnBrk="0" algn="l" indent="0" marL="0">
               <a:buNone/>
             </a:pPr>
             <a:r>
@@ -5033,7 +5033,7 @@
             </a:lvl1pPr>
           </a:lstStyle>
           <a:p>
-            <a:pPr algn="r"/>
+            <a:pPr eaLnBrk="0" algn="r"/>
             <a:fld id="{F7021451-1387-4CA6-816F-3879F97B5CBC}" type="slidenum">
               <a:rPr b="0" lang="en-US"/>
               <a:t>13</a:t>
@@ -5090,7 +5090,7 @@
           <a:bodyPr wrap="square" lIns="0" tIns="0" rIns="0" bIns="0" rtlCol="0" anchor="ctr"/>
           <a:lstStyle/>
           <a:p>
-            <a:pPr algn="l" indent="0" marL="0">
+            <a:pPr eaLnBrk="0" algn="l" indent="0" marL="0">
               <a:buNone/>
             </a:pPr>
             <a:r>
@@ -5129,7 +5129,7 @@
           <a:bodyPr wrap="square" lIns="0" tIns="0" rIns="0" bIns="0" rtlCol="0" anchor="ctr"/>
           <a:lstStyle/>
           <a:p>
-            <a:pPr algn="l" indent="0" marL="0">
+            <a:pPr eaLnBrk="0" algn="l" indent="0" marL="0">
               <a:buNone/>
             </a:pPr>
             <a:r>
@@ -5195,7 +5195,7 @@
           <a:bodyPr wrap="square" lIns="0" tIns="0" rIns="0" bIns="0" rtlCol="0" anchor="ctr"/>
           <a:lstStyle/>
           <a:p>
-            <a:pPr indent="0" marL="0">
+            <a:pPr eaLnBrk="0" indent="0" marL="0">
               <a:spcAft>
                 <a:spcPts val="600"/>
               </a:spcAft>
@@ -5285,7 +5285,7 @@
           <a:bodyPr wrap="square" lIns="0" tIns="0" rIns="0" bIns="0" rtlCol="0" anchor="ctr"/>
           <a:lstStyle/>
           <a:p>
-            <a:pPr algn="ctr" indent="0" marL="0">
+            <a:pPr eaLnBrk="0" algn="ctr" indent="0" marL="0">
               <a:buNone/>
             </a:pPr>
             <a:r>
@@ -5347,7 +5347,7 @@
           <a:bodyPr wrap="square" lIns="0" tIns="0" rIns="0" bIns="0" rtlCol="0" anchor="ctr"/>
           <a:lstStyle/>
           <a:p>
-            <a:pPr algn="ctr" indent="0" marL="0">
+            <a:pPr eaLnBrk="0" algn="ctr" indent="0" marL="0">
               <a:buNone/>
             </a:pPr>
             <a:r>
@@ -5409,7 +5409,7 @@
           <a:bodyPr wrap="square" lIns="0" tIns="0" rIns="0" bIns="0" rtlCol="0" anchor="ctr"/>
           <a:lstStyle/>
           <a:p>
-            <a:pPr algn="ctr" indent="0" marL="0">
+            <a:pPr eaLnBrk="0" algn="ctr" indent="0" marL="0">
               <a:buNone/>
             </a:pPr>
             <a:r>
@@ -5471,7 +5471,7 @@
           <a:bodyPr wrap="square" lIns="0" tIns="0" rIns="0" bIns="0" rtlCol="0" anchor="ctr"/>
           <a:lstStyle/>
           <a:p>
-            <a:pPr algn="ctr" indent="0" marL="0">
+            <a:pPr eaLnBrk="0" algn="ctr" indent="0" marL="0">
               <a:buNone/>
             </a:pPr>
             <a:r>
@@ -5533,7 +5533,7 @@
           <a:bodyPr wrap="square" lIns="0" tIns="0" rIns="0" bIns="0" rtlCol="0" anchor="ctr"/>
           <a:lstStyle/>
           <a:p>
-            <a:pPr algn="ctr" indent="0" marL="0">
+            <a:pPr eaLnBrk="0" algn="ctr" indent="0" marL="0">
               <a:buNone/>
             </a:pPr>
             <a:r>
@@ -5595,7 +5595,7 @@
           <a:bodyPr wrap="square" lIns="0" tIns="0" rIns="0" bIns="0" rtlCol="0" anchor="ctr"/>
           <a:lstStyle/>
           <a:p>
-            <a:pPr algn="ctr" indent="0" marL="0">
+            <a:pPr eaLnBrk="0" algn="ctr" indent="0" marL="0">
               <a:buNone/>
             </a:pPr>
             <a:r>
@@ -5657,7 +5657,7 @@
           <a:bodyPr wrap="square" lIns="0" tIns="0" rIns="0" bIns="0" rtlCol="0" anchor="ctr"/>
           <a:lstStyle/>
           <a:p>
-            <a:pPr algn="ctr" indent="0" marL="0">
+            <a:pPr eaLnBrk="0" algn="ctr" indent="0" marL="0">
               <a:buNone/>
             </a:pPr>
             <a:r>
@@ -5719,7 +5719,7 @@
           <a:bodyPr wrap="square" lIns="0" tIns="0" rIns="0" bIns="0" rtlCol="0" anchor="ctr"/>
           <a:lstStyle/>
           <a:p>
-            <a:pPr algn="ctr" indent="0" marL="0">
+            <a:pPr eaLnBrk="0" algn="ctr" indent="0" marL="0">
               <a:buNone/>
             </a:pPr>
             <a:r>
@@ -5781,7 +5781,7 @@
           <a:bodyPr wrap="square" lIns="0" tIns="0" rIns="0" bIns="0" rtlCol="0" anchor="ctr"/>
           <a:lstStyle/>
           <a:p>
-            <a:pPr algn="ctr" indent="0" marL="0">
+            <a:pPr eaLnBrk="0" algn="ctr" indent="0" marL="0">
               <a:buNone/>
             </a:pPr>
             <a:r>
@@ -5843,7 +5843,7 @@
           <a:bodyPr wrap="square" lIns="0" tIns="0" rIns="0" bIns="0" rtlCol="0" anchor="ctr"/>
           <a:lstStyle/>
           <a:p>
-            <a:pPr algn="ctr" indent="0" marL="0">
+            <a:pPr eaLnBrk="0" algn="ctr" indent="0" marL="0">
               <a:buNone/>
             </a:pPr>
             <a:r>
@@ -5929,7 +5929,7 @@
           <a:bodyPr wrap="square" lIns="0" tIns="0" rIns="0" bIns="0" rtlCol="0" anchor="ctr"/>
           <a:lstStyle/>
           <a:p>
-            <a:pPr algn="ctr" indent="0" marL="0">
+            <a:pPr eaLnBrk="0" algn="ctr" indent="0" marL="0">
               <a:buNone/>
             </a:pPr>
             <a:r>
@@ -6015,7 +6015,7 @@
           <a:bodyPr wrap="square" lIns="0" tIns="0" rIns="0" bIns="0" rtlCol="0" anchor="ctr"/>
           <a:lstStyle/>
           <a:p>
-            <a:pPr algn="ctr" indent="0" marL="0">
+            <a:pPr eaLnBrk="0" algn="ctr" indent="0" marL="0">
               <a:buNone/>
             </a:pPr>
             <a:r>
@@ -6101,7 +6101,7 @@
           <a:bodyPr wrap="square" lIns="0" tIns="0" rIns="0" bIns="0" rtlCol="0" anchor="ctr"/>
           <a:lstStyle/>
           <a:p>
-            <a:pPr algn="ctr" indent="0" marL="0">
+            <a:pPr eaLnBrk="0" algn="ctr" indent="0" marL="0">
               <a:buNone/>
             </a:pPr>
             <a:r>
@@ -6187,7 +6187,7 @@
             </a:lvl1pPr>
           </a:lstStyle>
           <a:p>
-            <a:pPr algn="r"/>
+            <a:pPr eaLnBrk="0" algn="r"/>
             <a:fld id="{F7021451-1387-4CA6-816F-3879F97B5CBC}" type="slidenum">
               <a:rPr b="0" lang="en-US"/>
               <a:t>14</a:t>
@@ -6244,7 +6244,7 @@
           <a:bodyPr wrap="square" lIns="0" tIns="0" rIns="0" bIns="0" rtlCol="0" anchor="ctr"/>
           <a:lstStyle/>
           <a:p>
-            <a:pPr algn="l" indent="0" marL="0">
+            <a:pPr eaLnBrk="0" algn="l" indent="0" marL="0">
               <a:buNone/>
             </a:pPr>
             <a:r>
@@ -6291,7 +6291,7 @@
           <a:bodyPr wrap="square" lIns="0" tIns="0" rIns="0" bIns="0" rtlCol="0" anchor="ctr"/>
           <a:lstStyle/>
           <a:p>
-            <a:pPr algn="ctr" indent="0" marL="0">
+            <a:pPr eaLnBrk="0" algn="ctr" indent="0" marL="0">
               <a:buNone/>
             </a:pPr>
             <a:r>
@@ -6761,7 +6761,7 @@
       </p:sp>
       <p:sp>
         <p:nvSpPr>
-          <p:cNvPr id="22" name="S02-figure29" descr="십 칸 틀에 8개"/>
+          <p:cNvPr id="22" name="S02-figure29" descr="1개의 십 칸 틀 중 1번째: 모두 8개"/>
           <p:cNvSpPr/>
           <p:nvPr/>
         </p:nvSpPr>
@@ -6815,7 +6815,7 @@
           <a:bodyPr wrap="square" lIns="0" tIns="0" rIns="0" bIns="0" rtlCol="0" anchor="ctr"/>
           <a:lstStyle/>
           <a:p>
-            <a:pPr algn="ctr" indent="0" marL="0">
+            <a:pPr eaLnBrk="0" algn="ctr" indent="0" marL="0">
               <a:buNone/>
             </a:pPr>
             <a:r>
@@ -6854,7 +6854,7 @@
           <a:bodyPr wrap="square" lIns="0" tIns="0" rIns="0" bIns="0" rtlCol="0" anchor="ctr"/>
           <a:lstStyle/>
           <a:p>
-            <a:pPr algn="l" indent="0" marL="0">
+            <a:pPr eaLnBrk="0" algn="l" indent="0" marL="0">
               <a:buNone/>
             </a:pPr>
             <a:r>
@@ -6901,7 +6901,7 @@
           <a:bodyPr wrap="square" lIns="0" tIns="0" rIns="0" bIns="0" rtlCol="0" anchor="ctr"/>
           <a:lstStyle/>
           <a:p>
-            <a:pPr algn="ctr" indent="0" marL="0">
+            <a:pPr eaLnBrk="0" algn="ctr" indent="0" marL="0">
               <a:buNone/>
             </a:pPr>
             <a:r>
@@ -6940,7 +6940,7 @@
           <a:bodyPr wrap="square" lIns="0" tIns="0" rIns="0" bIns="0" rtlCol="0" anchor="ctr"/>
           <a:lstStyle/>
           <a:p>
-            <a:pPr algn="l" indent="0" marL="0">
+            <a:pPr eaLnBrk="0" algn="l" indent="0" marL="0">
               <a:buNone/>
             </a:pPr>
             <a:r>
@@ -6997,7 +6997,7 @@
             </a:lvl1pPr>
           </a:lstStyle>
           <a:p>
-            <a:pPr algn="r"/>
+            <a:pPr eaLnBrk="0" algn="r"/>
             <a:fld id="{F7021451-1387-4CA6-816F-3879F97B5CBC}" type="slidenum">
               <a:rPr b="0" lang="en-US"/>
               <a:t>2</a:t>
@@ -7054,7 +7054,7 @@
           <a:bodyPr wrap="square" lIns="0" tIns="0" rIns="0" bIns="0" rtlCol="0" anchor="ctr"/>
           <a:lstStyle/>
           <a:p>
-            <a:pPr algn="l" indent="0" marL="0">
+            <a:pPr eaLnBrk="0" algn="l" indent="0" marL="0">
               <a:buNone/>
             </a:pPr>
             <a:r>
@@ -7093,7 +7093,7 @@
           <a:bodyPr wrap="square" lIns="0" tIns="0" rIns="0" bIns="0" rtlCol="0" anchor="ctr"/>
           <a:lstStyle/>
           <a:p>
-            <a:pPr algn="l" indent="0" marL="0">
+            <a:pPr eaLnBrk="0" algn="l" indent="0" marL="0">
               <a:buNone/>
             </a:pPr>
             <a:r>
@@ -7159,7 +7159,7 @@
           <a:bodyPr wrap="square" lIns="0" tIns="0" rIns="0" bIns="0" rtlCol="0" anchor="ctr"/>
           <a:lstStyle/>
           <a:p>
-            <a:pPr indent="0" marL="0">
+            <a:pPr eaLnBrk="0" indent="0" marL="0">
               <a:spcAft>
                 <a:spcPts val="600"/>
               </a:spcAft>
@@ -7280,7 +7280,7 @@
           <a:bodyPr wrap="square" lIns="0" tIns="0" rIns="0" bIns="0" rtlCol="0" anchor="ctr"/>
           <a:lstStyle/>
           <a:p>
-            <a:pPr algn="ctr" indent="0" marL="0">
+            <a:pPr eaLnBrk="0" algn="ctr" indent="0" marL="0">
               <a:buNone/>
             </a:pPr>
             <a:r>
@@ -7423,7 +7423,7 @@
           <a:bodyPr wrap="square" lIns="0" tIns="0" rIns="0" bIns="0" rtlCol="0" anchor="ctr"/>
           <a:lstStyle/>
           <a:p>
-            <a:pPr algn="ctr" indent="0" marL="0">
+            <a:pPr eaLnBrk="0" algn="ctr" indent="0" marL="0">
               <a:buNone/>
             </a:pPr>
             <a:r>
@@ -7480,7 +7480,7 @@
             </a:lvl1pPr>
           </a:lstStyle>
           <a:p>
-            <a:pPr algn="r"/>
+            <a:pPr eaLnBrk="0" algn="r"/>
             <a:fld id="{F7021451-1387-4CA6-816F-3879F97B5CBC}" type="slidenum">
               <a:rPr b="0" lang="en-US"/>
               <a:t>3</a:t>
@@ -7537,7 +7537,7 @@
           <a:bodyPr wrap="square" lIns="0" tIns="0" rIns="0" bIns="0" rtlCol="0" anchor="ctr"/>
           <a:lstStyle/>
           <a:p>
-            <a:pPr algn="l" indent="0" marL="0">
+            <a:pPr eaLnBrk="0" algn="l" indent="0" marL="0">
               <a:buNone/>
             </a:pPr>
             <a:r>
@@ -7576,7 +7576,7 @@
           <a:bodyPr wrap="square" lIns="0" tIns="0" rIns="0" bIns="0" rtlCol="0" anchor="ctr"/>
           <a:lstStyle/>
           <a:p>
-            <a:pPr algn="l" indent="0" marL="0">
+            <a:pPr eaLnBrk="0" algn="l" indent="0" marL="0">
               <a:buNone/>
             </a:pPr>
             <a:r>
@@ -7642,7 +7642,7 @@
           <a:bodyPr wrap="square" lIns="0" tIns="0" rIns="0" bIns="0" rtlCol="0" anchor="ctr"/>
           <a:lstStyle/>
           <a:p>
-            <a:pPr indent="0" marL="0">
+            <a:pPr eaLnBrk="0" indent="0" marL="0">
               <a:spcAft>
                 <a:spcPts val="600"/>
               </a:spcAft>
@@ -7698,7 +7698,7 @@
                     <a:bodyPr/>
                     <a:lstStyle/>
                     <a:p>
-                      <a:pPr algn="ctr" indent="0" marL="0">
+                      <a:pPr eaLnBrk="0" algn="ctr" indent="0" marL="0">
                         <a:buNone/>
                       </a:pPr>
                       <a:r>
@@ -7766,7 +7766,7 @@
                     <a:bodyPr/>
                     <a:lstStyle/>
                     <a:p>
-                      <a:pPr algn="ctr" indent="0" marL="0">
+                      <a:pPr eaLnBrk="0" algn="ctr" indent="0" marL="0">
                         <a:buNone/>
                       </a:pPr>
                       <a:r>
@@ -7834,7 +7834,7 @@
                     <a:bodyPr/>
                     <a:lstStyle/>
                     <a:p>
-                      <a:pPr algn="ctr" indent="0" marL="0">
+                      <a:pPr eaLnBrk="0" algn="ctr" indent="0" marL="0">
                         <a:buNone/>
                       </a:pPr>
                       <a:r>
@@ -7902,7 +7902,7 @@
                     <a:bodyPr/>
                     <a:lstStyle/>
                     <a:p>
-                      <a:pPr algn="ctr" indent="0" marL="0">
+                      <a:pPr eaLnBrk="0" algn="ctr" indent="0" marL="0">
                         <a:buNone/>
                       </a:pPr>
                       <a:r>
@@ -7970,7 +7970,7 @@
                     <a:bodyPr/>
                     <a:lstStyle/>
                     <a:p>
-                      <a:pPr algn="ctr" indent="0" marL="0">
+                      <a:pPr eaLnBrk="0" algn="ctr" indent="0" marL="0">
                         <a:buNone/>
                       </a:pPr>
                       <a:r>
@@ -8040,7 +8040,7 @@
                     <a:bodyPr/>
                     <a:lstStyle/>
                     <a:p>
-                      <a:pPr algn="ctr" indent="0" marL="0">
+                      <a:pPr eaLnBrk="0" algn="ctr" indent="0" marL="0">
                         <a:buNone/>
                       </a:pPr>
                       <a:r>
@@ -8108,7 +8108,7 @@
                     <a:bodyPr/>
                     <a:lstStyle/>
                     <a:p>
-                      <a:pPr algn="ctr" indent="0" marL="0">
+                      <a:pPr eaLnBrk="0" algn="ctr" indent="0" marL="0">
                         <a:buNone/>
                       </a:pPr>
                       <a:r>
@@ -8176,7 +8176,7 @@
                     <a:bodyPr/>
                     <a:lstStyle/>
                     <a:p>
-                      <a:pPr algn="ctr" indent="0" marL="0">
+                      <a:pPr eaLnBrk="0" algn="ctr" indent="0" marL="0">
                         <a:buNone/>
                       </a:pPr>
                       <a:r>
@@ -8244,7 +8244,7 @@
                     <a:bodyPr/>
                     <a:lstStyle/>
                     <a:p>
-                      <a:pPr algn="ctr" indent="0" marL="0">
+                      <a:pPr eaLnBrk="0" algn="ctr" indent="0" marL="0">
                         <a:buNone/>
                       </a:pPr>
                       <a:r>
@@ -8312,7 +8312,7 @@
                     <a:bodyPr/>
                     <a:lstStyle/>
                     <a:p>
-                      <a:pPr algn="ctr" indent="0" marL="0">
+                      <a:pPr eaLnBrk="0" algn="ctr" indent="0" marL="0">
                         <a:buNone/>
                       </a:pPr>
                       <a:r>
@@ -8382,7 +8382,7 @@
                     <a:bodyPr/>
                     <a:lstStyle/>
                     <a:p>
-                      <a:pPr algn="ctr" indent="0" marL="0">
+                      <a:pPr eaLnBrk="0" algn="ctr" indent="0" marL="0">
                         <a:buNone/>
                       </a:pPr>
                       <a:r>
@@ -8450,7 +8450,7 @@
                     <a:bodyPr/>
                     <a:lstStyle/>
                     <a:p>
-                      <a:pPr algn="ctr" indent="0" marL="0">
+                      <a:pPr eaLnBrk="0" algn="ctr" indent="0" marL="0">
                         <a:buNone/>
                       </a:pPr>
                       <a:r>
@@ -8518,7 +8518,7 @@
                     <a:bodyPr/>
                     <a:lstStyle/>
                     <a:p>
-                      <a:pPr algn="ctr" indent="0" marL="0">
+                      <a:pPr eaLnBrk="0" algn="ctr" indent="0" marL="0">
                         <a:buNone/>
                       </a:pPr>
                       <a:r>
@@ -8586,7 +8586,7 @@
                     <a:bodyPr/>
                     <a:lstStyle/>
                     <a:p>
-                      <a:pPr algn="ctr" indent="0" marL="0">
+                      <a:pPr eaLnBrk="0" algn="ctr" indent="0" marL="0">
                         <a:buNone/>
                       </a:pPr>
                       <a:r>
@@ -8654,7 +8654,7 @@
                     <a:bodyPr/>
                     <a:lstStyle/>
                     <a:p>
-                      <a:pPr algn="ctr" indent="0" marL="0">
+                      <a:pPr eaLnBrk="0" algn="ctr" indent="0" marL="0">
                         <a:buNone/>
                       </a:pPr>
                       <a:r>
@@ -8761,7 +8761,7 @@
             </a:lvl1pPr>
           </a:lstStyle>
           <a:p>
-            <a:pPr algn="r"/>
+            <a:pPr eaLnBrk="0" algn="r"/>
             <a:fld id="{F7021451-1387-4CA6-816F-3879F97B5CBC}" type="slidenum">
               <a:rPr b="0" lang="en-US"/>
               <a:t>4</a:t>
@@ -8818,7 +8818,7 @@
           <a:bodyPr wrap="square" lIns="0" tIns="0" rIns="0" bIns="0" rtlCol="0" anchor="ctr"/>
           <a:lstStyle/>
           <a:p>
-            <a:pPr algn="l" indent="0" marL="0">
+            <a:pPr eaLnBrk="0" algn="l" indent="0" marL="0">
               <a:buNone/>
             </a:pPr>
             <a:r>
@@ -8857,7 +8857,7 @@
           <a:bodyPr wrap="square" lIns="0" tIns="0" rIns="0" bIns="0" rtlCol="0" anchor="ctr"/>
           <a:lstStyle/>
           <a:p>
-            <a:pPr algn="l" indent="0" marL="0">
+            <a:pPr eaLnBrk="0" algn="l" indent="0" marL="0">
               <a:buNone/>
             </a:pPr>
             <a:r>
@@ -8923,7 +8923,7 @@
           <a:bodyPr wrap="square" lIns="0" tIns="0" rIns="0" bIns="0" rtlCol="0" anchor="ctr"/>
           <a:lstStyle/>
           <a:p>
-            <a:pPr indent="0" marL="0">
+            <a:pPr eaLnBrk="0" indent="0" marL="0">
               <a:spcAft>
                 <a:spcPts val="600"/>
               </a:spcAft>
@@ -9069,7 +9069,7 @@
           <a:bodyPr wrap="square" lIns="0" tIns="0" rIns="0" bIns="0" rtlCol="0" anchor="ctr"/>
           <a:lstStyle/>
           <a:p>
-            <a:pPr algn="ctr" indent="0" marL="0">
+            <a:pPr eaLnBrk="0" algn="ctr" indent="0" marL="0">
               <a:buNone/>
             </a:pPr>
             <a:r>
@@ -9237,7 +9237,7 @@
           <a:bodyPr wrap="square" lIns="0" tIns="0" rIns="0" bIns="0" rtlCol="0" anchor="ctr"/>
           <a:lstStyle/>
           <a:p>
-            <a:pPr algn="ctr" indent="0" marL="0">
+            <a:pPr eaLnBrk="0" algn="ctr" indent="0" marL="0">
               <a:buNone/>
             </a:pPr>
             <a:r>
@@ -9294,7 +9294,7 @@
             </a:lvl1pPr>
           </a:lstStyle>
           <a:p>
-            <a:pPr algn="r"/>
+            <a:pPr eaLnBrk="0" algn="r"/>
             <a:fld id="{F7021451-1387-4CA6-816F-3879F97B5CBC}" type="slidenum">
               <a:rPr b="0" lang="en-US"/>
               <a:t>5</a:t>
@@ -9351,7 +9351,7 @@
           <a:bodyPr wrap="square" lIns="0" tIns="0" rIns="0" bIns="0" rtlCol="0" anchor="ctr"/>
           <a:lstStyle/>
           <a:p>
-            <a:pPr algn="l" indent="0" marL="0">
+            <a:pPr eaLnBrk="0" algn="l" indent="0" marL="0">
               <a:buNone/>
             </a:pPr>
             <a:r>
@@ -9417,7 +9417,7 @@
           <a:bodyPr wrap="square" lIns="0" tIns="0" rIns="0" bIns="0" rtlCol="0" anchor="ctr"/>
           <a:lstStyle/>
           <a:p>
-            <a:pPr indent="0" marL="0">
+            <a:pPr eaLnBrk="0" indent="0" marL="0">
               <a:spcAft>
                 <a:spcPts val="600"/>
               </a:spcAft>
@@ -9459,7 +9459,7 @@
           <a:bodyPr wrap="square" lIns="0" tIns="0" rIns="0" bIns="0" rtlCol="0" anchor="ctr"/>
           <a:lstStyle/>
           <a:p>
-            <a:pPr algn="ctr" indent="0" marL="0">
+            <a:pPr eaLnBrk="0" algn="ctr" indent="0" marL="0">
               <a:buNone/>
             </a:pPr>
             <a:r>
@@ -9476,7 +9476,7 @@
             <a:endParaRPr lang="ko-KR" sz="3600" dirty="0"/>
           </a:p>
           <a:p>
-            <a:pPr algn="ctr" indent="0" marL="0">
+            <a:pPr eaLnBrk="0" algn="ctr" indent="0" marL="0">
               <a:buNone/>
             </a:pPr>
             <a:r>
@@ -9493,7 +9493,7 @@
             <a:endParaRPr lang="ko-KR" sz="3600" dirty="0"/>
           </a:p>
           <a:p>
-            <a:pPr algn="ctr" indent="0" marL="0">
+            <a:pPr eaLnBrk="0" algn="ctr" indent="0" marL="0">
               <a:buNone/>
             </a:pPr>
             <a:r>
@@ -9532,7 +9532,7 @@
           <a:bodyPr wrap="square" lIns="0" tIns="0" rIns="0" bIns="0" rtlCol="0" anchor="ctr"/>
           <a:lstStyle/>
           <a:p>
-            <a:pPr algn="ctr" indent="0" marL="0">
+            <a:pPr eaLnBrk="0" algn="ctr" indent="0" marL="0">
               <a:buNone/>
             </a:pPr>
             <a:r>
@@ -9571,7 +9571,7 @@
           <a:bodyPr wrap="square" lIns="0" tIns="0" rIns="0" bIns="0" rtlCol="0" anchor="ctr"/>
           <a:lstStyle/>
           <a:p>
-            <a:pPr algn="ctr" indent="0" marL="0">
+            <a:pPr eaLnBrk="0" algn="ctr" indent="0" marL="0">
               <a:buNone/>
             </a:pPr>
             <a:r>
@@ -9588,7 +9588,7 @@
             <a:endParaRPr lang="ko-KR" sz="3600" dirty="0"/>
           </a:p>
           <a:p>
-            <a:pPr algn="ctr" indent="0" marL="0">
+            <a:pPr eaLnBrk="0" algn="ctr" indent="0" marL="0">
               <a:buNone/>
             </a:pPr>
             <a:r>
@@ -9605,7 +9605,7 @@
             <a:endParaRPr lang="ko-KR" sz="3600" dirty="0"/>
           </a:p>
           <a:p>
-            <a:pPr algn="ctr" indent="0" marL="0">
+            <a:pPr eaLnBrk="0" algn="ctr" indent="0" marL="0">
               <a:buNone/>
             </a:pPr>
             <a:r>
@@ -9644,7 +9644,7 @@
           <a:bodyPr wrap="square" lIns="0" tIns="0" rIns="0" bIns="0" rtlCol="0" anchor="ctr"/>
           <a:lstStyle/>
           <a:p>
-            <a:pPr algn="ctr" indent="0" marL="0">
+            <a:pPr eaLnBrk="0" algn="ctr" indent="0" marL="0">
               <a:buNone/>
             </a:pPr>
             <a:r>
@@ -9701,7 +9701,7 @@
             </a:lvl1pPr>
           </a:lstStyle>
           <a:p>
-            <a:pPr algn="r"/>
+            <a:pPr eaLnBrk="0" algn="r"/>
             <a:fld id="{F7021451-1387-4CA6-816F-3879F97B5CBC}" type="slidenum">
               <a:rPr b="0" lang="en-US"/>
               <a:t>6</a:t>
@@ -9758,7 +9758,7 @@
           <a:bodyPr wrap="square" lIns="0" tIns="0" rIns="0" bIns="0" rtlCol="0" anchor="ctr"/>
           <a:lstStyle/>
           <a:p>
-            <a:pPr algn="l" indent="0" marL="0">
+            <a:pPr eaLnBrk="0" algn="l" indent="0" marL="0">
               <a:buNone/>
             </a:pPr>
             <a:r>
@@ -9824,7 +9824,7 @@
           <a:bodyPr wrap="square" lIns="0" tIns="0" rIns="0" bIns="0" rtlCol="0" anchor="ctr"/>
           <a:lstStyle/>
           <a:p>
-            <a:pPr indent="0" marL="0">
+            <a:pPr eaLnBrk="0" indent="0" marL="0">
               <a:spcAft>
                 <a:spcPts val="600"/>
               </a:spcAft>
@@ -9893,7 +9893,7 @@
           <a:bodyPr wrap="square" lIns="0" tIns="0" rIns="0" bIns="0" rtlCol="0" anchor="ctr"/>
           <a:lstStyle/>
           <a:p>
-            <a:pPr indent="0" marL="0">
+            <a:pPr eaLnBrk="0" indent="0" marL="0">
               <a:spcAft>
                 <a:spcPts val="600"/>
               </a:spcAft>
@@ -9962,7 +9962,7 @@
           <a:bodyPr wrap="square" lIns="0" tIns="0" rIns="0" bIns="0" rtlCol="0" anchor="ctr"/>
           <a:lstStyle/>
           <a:p>
-            <a:pPr indent="0" marL="0">
+            <a:pPr eaLnBrk="0" indent="0" marL="0">
               <a:spcAft>
                 <a:spcPts val="600"/>
               </a:spcAft>
@@ -10485,7 +10485,7 @@
       </p:sp>
       <p:sp>
         <p:nvSpPr>
-          <p:cNvPr id="29" name="S07-figure96" descr="십 칸 틀에 10개"/>
+          <p:cNvPr id="29" name="S07-figure96" descr="1개의 십 칸 틀 중 1번째: 모두 10개"/>
           <p:cNvSpPr/>
           <p:nvPr/>
         </p:nvSpPr>
@@ -10549,7 +10549,7 @@
             </a:lvl1pPr>
           </a:lstStyle>
           <a:p>
-            <a:pPr algn="r"/>
+            <a:pPr eaLnBrk="0" algn="r"/>
             <a:fld id="{F7021451-1387-4CA6-816F-3879F97B5CBC}" type="slidenum">
               <a:rPr b="0" lang="en-US"/>
               <a:t>7</a:t>
@@ -10606,7 +10606,7 @@
           <a:bodyPr wrap="square" lIns="0" tIns="0" rIns="0" bIns="0" rtlCol="0" anchor="ctr"/>
           <a:lstStyle/>
           <a:p>
-            <a:pPr algn="l" indent="0" marL="0">
+            <a:pPr eaLnBrk="0" algn="l" indent="0" marL="0">
               <a:buNone/>
             </a:pPr>
             <a:r>
@@ -10672,7 +10672,7 @@
           <a:bodyPr wrap="square" lIns="0" tIns="0" rIns="0" bIns="0" rtlCol="0" anchor="ctr"/>
           <a:lstStyle/>
           <a:p>
-            <a:pPr indent="0" marL="0">
+            <a:pPr eaLnBrk="0" indent="0" marL="0">
               <a:spcAft>
                 <a:spcPts val="600"/>
               </a:spcAft>
@@ -10722,7 +10722,7 @@
           <a:bodyPr wrap="square" lIns="0" tIns="0" rIns="0" bIns="0" rtlCol="0" anchor="ctr"/>
           <a:lstStyle/>
           <a:p>
-            <a:pPr algn="ctr" indent="0" marL="0">
+            <a:pPr eaLnBrk="0" algn="ctr" indent="0" marL="0">
               <a:buNone/>
             </a:pPr>
             <a:r>
@@ -10761,7 +10761,7 @@
           <a:bodyPr wrap="square" lIns="0" tIns="0" rIns="0" bIns="0" rtlCol="0" anchor="ctr"/>
           <a:lstStyle/>
           <a:p>
-            <a:pPr algn="ctr" indent="0" marL="0">
+            <a:pPr eaLnBrk="0" algn="ctr" indent="0" marL="0">
               <a:buNone/>
             </a:pPr>
             <a:r>
@@ -10778,7 +10778,7 @@
             <a:endParaRPr lang="ko-KR" sz="2600" dirty="0"/>
           </a:p>
           <a:p>
-            <a:pPr algn="ctr" indent="0" marL="0">
+            <a:pPr eaLnBrk="0" algn="ctr" indent="0" marL="0">
               <a:buNone/>
             </a:pPr>
             <a:r>
@@ -10795,7 +10795,7 @@
             <a:endParaRPr lang="ko-KR" sz="2600" dirty="0"/>
           </a:p>
           <a:p>
-            <a:pPr algn="ctr" indent="0" marL="0">
+            <a:pPr eaLnBrk="0" algn="ctr" indent="0" marL="0">
               <a:buNone/>
             </a:pPr>
             <a:r>
@@ -10842,7 +10842,7 @@
           <a:bodyPr wrap="square" lIns="0" tIns="0" rIns="0" bIns="0" rtlCol="0" anchor="ctr"/>
           <a:lstStyle/>
           <a:p>
-            <a:pPr algn="ctr" indent="0" marL="0">
+            <a:pPr eaLnBrk="0" algn="ctr" indent="0" marL="0">
               <a:buNone/>
             </a:pPr>
             <a:r>
@@ -10881,7 +10881,7 @@
           <a:bodyPr wrap="square" lIns="0" tIns="0" rIns="0" bIns="0" rtlCol="0" anchor="ctr"/>
           <a:lstStyle/>
           <a:p>
-            <a:pPr algn="ctr" indent="0" marL="0">
+            <a:pPr eaLnBrk="0" algn="ctr" indent="0" marL="0">
               <a:buNone/>
             </a:pPr>
             <a:r>
@@ -10898,7 +10898,7 @@
             <a:endParaRPr lang="ko-KR" sz="2600" dirty="0"/>
           </a:p>
           <a:p>
-            <a:pPr algn="ctr" indent="0" marL="0">
+            <a:pPr eaLnBrk="0" algn="ctr" indent="0" marL="0">
               <a:buNone/>
             </a:pPr>
             <a:r>
@@ -10915,7 +10915,7 @@
             <a:endParaRPr lang="ko-KR" sz="2600" dirty="0"/>
           </a:p>
           <a:p>
-            <a:pPr algn="ctr" indent="0" marL="0">
+            <a:pPr eaLnBrk="0" algn="ctr" indent="0" marL="0">
               <a:buNone/>
             </a:pPr>
             <a:r>
@@ -10962,7 +10962,7 @@
           <a:bodyPr wrap="square" lIns="0" tIns="0" rIns="0" bIns="0" rtlCol="0" anchor="ctr"/>
           <a:lstStyle/>
           <a:p>
-            <a:pPr algn="ctr" indent="0" marL="0">
+            <a:pPr eaLnBrk="0" algn="ctr" indent="0" marL="0">
               <a:buNone/>
             </a:pPr>
             <a:r>
@@ -11001,7 +11001,7 @@
           <a:bodyPr wrap="square" lIns="0" tIns="0" rIns="0" bIns="0" rtlCol="0" anchor="ctr"/>
           <a:lstStyle/>
           <a:p>
-            <a:pPr algn="ctr" indent="0" marL="0">
+            <a:pPr eaLnBrk="0" algn="ctr" indent="0" marL="0">
               <a:buNone/>
             </a:pPr>
             <a:r>
@@ -11018,7 +11018,7 @@
             <a:endParaRPr lang="ko-KR" sz="2600" dirty="0"/>
           </a:p>
           <a:p>
-            <a:pPr algn="ctr" indent="0" marL="0">
+            <a:pPr eaLnBrk="0" algn="ctr" indent="0" marL="0">
               <a:buNone/>
             </a:pPr>
             <a:r>
@@ -11035,7 +11035,7 @@
             <a:endParaRPr lang="ko-KR" sz="2600" dirty="0"/>
           </a:p>
           <a:p>
-            <a:pPr algn="ctr" indent="0" marL="0">
+            <a:pPr eaLnBrk="0" algn="ctr" indent="0" marL="0">
               <a:buNone/>
             </a:pPr>
             <a:r>
@@ -11082,7 +11082,7 @@
           <a:bodyPr wrap="square" lIns="0" tIns="0" rIns="0" bIns="0" rtlCol="0" anchor="ctr"/>
           <a:lstStyle/>
           <a:p>
-            <a:pPr algn="ctr" indent="0" marL="0">
+            <a:pPr eaLnBrk="0" algn="ctr" indent="0" marL="0">
               <a:buNone/>
             </a:pPr>
             <a:r>
@@ -11121,7 +11121,7 @@
           <a:bodyPr wrap="square" lIns="0" tIns="0" rIns="0" bIns="0" rtlCol="0" anchor="ctr"/>
           <a:lstStyle/>
           <a:p>
-            <a:pPr algn="ctr" indent="0" marL="0">
+            <a:pPr eaLnBrk="0" algn="ctr" indent="0" marL="0">
               <a:buNone/>
             </a:pPr>
             <a:r>
@@ -11138,7 +11138,7 @@
             <a:endParaRPr lang="ko-KR" sz="2600" dirty="0"/>
           </a:p>
           <a:p>
-            <a:pPr algn="ctr" indent="0" marL="0">
+            <a:pPr eaLnBrk="0" algn="ctr" indent="0" marL="0">
               <a:buNone/>
             </a:pPr>
             <a:r>
@@ -11155,7 +11155,7 @@
             <a:endParaRPr lang="ko-KR" sz="2600" dirty="0"/>
           </a:p>
           <a:p>
-            <a:pPr algn="ctr" indent="0" marL="0">
+            <a:pPr eaLnBrk="0" algn="ctr" indent="0" marL="0">
               <a:buNone/>
             </a:pPr>
             <a:r>
@@ -11212,7 +11212,7 @@
             </a:lvl1pPr>
           </a:lstStyle>
           <a:p>
-            <a:pPr algn="r"/>
+            <a:pPr eaLnBrk="0" algn="r"/>
             <a:fld id="{F7021451-1387-4CA6-816F-3879F97B5CBC}" type="slidenum">
               <a:rPr b="0" lang="en-US"/>
               <a:t>8</a:t>
@@ -11269,7 +11269,7 @@
           <a:bodyPr wrap="square" lIns="0" tIns="0" rIns="0" bIns="0" rtlCol="0" anchor="ctr"/>
           <a:lstStyle/>
           <a:p>
-            <a:pPr algn="l" indent="0" marL="0">
+            <a:pPr eaLnBrk="0" algn="l" indent="0" marL="0">
               <a:buNone/>
             </a:pPr>
             <a:r>
@@ -11335,7 +11335,7 @@
           <a:bodyPr wrap="square" lIns="0" tIns="0" rIns="0" bIns="0" rtlCol="0" anchor="ctr"/>
           <a:lstStyle/>
           <a:p>
-            <a:pPr indent="0" marL="0">
+            <a:pPr eaLnBrk="0" indent="0" marL="0">
               <a:spcAft>
                 <a:spcPts val="600"/>
               </a:spcAft>
@@ -11385,7 +11385,7 @@
           <a:bodyPr wrap="square" lIns="0" tIns="0" rIns="0" bIns="0" rtlCol="0" anchor="ctr"/>
           <a:lstStyle/>
           <a:p>
-            <a:pPr algn="ctr" indent="0" marL="0">
+            <a:pPr eaLnBrk="0" algn="ctr" indent="0" marL="0">
               <a:buNone/>
             </a:pPr>
             <a:r>
@@ -11424,7 +11424,7 @@
           <a:bodyPr wrap="square" lIns="0" tIns="0" rIns="0" bIns="0" rtlCol="0" anchor="ctr"/>
           <a:lstStyle/>
           <a:p>
-            <a:pPr algn="ctr" indent="0" marL="0">
+            <a:pPr eaLnBrk="0" algn="ctr" indent="0" marL="0">
               <a:buNone/>
             </a:pPr>
             <a:r>
@@ -11441,7 +11441,7 @@
             <a:endParaRPr lang="ko-KR" sz="2600" dirty="0"/>
           </a:p>
           <a:p>
-            <a:pPr algn="ctr" indent="0" marL="0">
+            <a:pPr eaLnBrk="0" algn="ctr" indent="0" marL="0">
               <a:buNone/>
             </a:pPr>
             <a:r>
@@ -11458,7 +11458,7 @@
             <a:endParaRPr lang="ko-KR" sz="2600" dirty="0"/>
           </a:p>
           <a:p>
-            <a:pPr algn="ctr" indent="0" marL="0">
+            <a:pPr eaLnBrk="0" algn="ctr" indent="0" marL="0">
               <a:buNone/>
             </a:pPr>
             <a:r>
@@ -11505,7 +11505,7 @@
           <a:bodyPr wrap="square" lIns="0" tIns="0" rIns="0" bIns="0" rtlCol="0" anchor="ctr"/>
           <a:lstStyle/>
           <a:p>
-            <a:pPr algn="ctr" indent="0" marL="0">
+            <a:pPr eaLnBrk="0" algn="ctr" indent="0" marL="0">
               <a:buNone/>
             </a:pPr>
             <a:r>
@@ -11544,7 +11544,7 @@
           <a:bodyPr wrap="square" lIns="0" tIns="0" rIns="0" bIns="0" rtlCol="0" anchor="ctr"/>
           <a:lstStyle/>
           <a:p>
-            <a:pPr algn="ctr" indent="0" marL="0">
+            <a:pPr eaLnBrk="0" algn="ctr" indent="0" marL="0">
               <a:buNone/>
             </a:pPr>
             <a:r>
@@ -11561,7 +11561,7 @@
             <a:endParaRPr lang="ko-KR" sz="2600" dirty="0"/>
           </a:p>
           <a:p>
-            <a:pPr algn="ctr" indent="0" marL="0">
+            <a:pPr eaLnBrk="0" algn="ctr" indent="0" marL="0">
               <a:buNone/>
             </a:pPr>
             <a:r>
@@ -11578,7 +11578,7 @@
             <a:endParaRPr lang="ko-KR" sz="2600" dirty="0"/>
           </a:p>
           <a:p>
-            <a:pPr algn="ctr" indent="0" marL="0">
+            <a:pPr eaLnBrk="0" algn="ctr" indent="0" marL="0">
               <a:buNone/>
             </a:pPr>
             <a:r>
@@ -11625,7 +11625,7 @@
           <a:bodyPr wrap="square" lIns="0" tIns="0" rIns="0" bIns="0" rtlCol="0" anchor="ctr"/>
           <a:lstStyle/>
           <a:p>
-            <a:pPr algn="ctr" indent="0" marL="0">
+            <a:pPr eaLnBrk="0" algn="ctr" indent="0" marL="0">
               <a:buNone/>
             </a:pPr>
             <a:r>
@@ -11664,7 +11664,7 @@
           <a:bodyPr wrap="square" lIns="0" tIns="0" rIns="0" bIns="0" rtlCol="0" anchor="ctr"/>
           <a:lstStyle/>
           <a:p>
-            <a:pPr algn="ctr" indent="0" marL="0">
+            <a:pPr eaLnBrk="0" algn="ctr" indent="0" marL="0">
               <a:buNone/>
             </a:pPr>
             <a:r>
@@ -11681,7 +11681,7 @@
             <a:endParaRPr lang="ko-KR" sz="2600" dirty="0"/>
           </a:p>
           <a:p>
-            <a:pPr algn="ctr" indent="0" marL="0">
+            <a:pPr eaLnBrk="0" algn="ctr" indent="0" marL="0">
               <a:buNone/>
             </a:pPr>
             <a:r>
@@ -11698,7 +11698,7 @@
             <a:endParaRPr lang="ko-KR" sz="2600" dirty="0"/>
           </a:p>
           <a:p>
-            <a:pPr algn="ctr" indent="0" marL="0">
+            <a:pPr eaLnBrk="0" algn="ctr" indent="0" marL="0">
               <a:buNone/>
             </a:pPr>
             <a:r>
@@ -11745,7 +11745,7 @@
           <a:bodyPr wrap="square" lIns="0" tIns="0" rIns="0" bIns="0" rtlCol="0" anchor="ctr"/>
           <a:lstStyle/>
           <a:p>
-            <a:pPr algn="ctr" indent="0" marL="0">
+            <a:pPr eaLnBrk="0" algn="ctr" indent="0" marL="0">
               <a:buNone/>
             </a:pPr>
             <a:r>
@@ -11784,7 +11784,7 @@
           <a:bodyPr wrap="square" lIns="0" tIns="0" rIns="0" bIns="0" rtlCol="0" anchor="ctr"/>
           <a:lstStyle/>
           <a:p>
-            <a:pPr algn="ctr" indent="0" marL="0">
+            <a:pPr eaLnBrk="0" algn="ctr" indent="0" marL="0">
               <a:buNone/>
             </a:pPr>
             <a:r>
@@ -11801,7 +11801,7 @@
             <a:endParaRPr lang="ko-KR" sz="2600" dirty="0"/>
           </a:p>
           <a:p>
-            <a:pPr algn="ctr" indent="0" marL="0">
+            <a:pPr eaLnBrk="0" algn="ctr" indent="0" marL="0">
               <a:buNone/>
             </a:pPr>
             <a:r>
@@ -11818,7 +11818,7 @@
             <a:endParaRPr lang="ko-KR" sz="2600" dirty="0"/>
           </a:p>
           <a:p>
-            <a:pPr algn="ctr" indent="0" marL="0">
+            <a:pPr eaLnBrk="0" algn="ctr" indent="0" marL="0">
               <a:buNone/>
             </a:pPr>
             <a:r>
@@ -11875,7 +11875,7 @@
             </a:lvl1pPr>
           </a:lstStyle>
           <a:p>
-            <a:pPr algn="r"/>
+            <a:pPr eaLnBrk="0" algn="r"/>
             <a:fld id="{F7021451-1387-4CA6-816F-3879F97B5CBC}" type="slidenum">
               <a:rPr b="0" lang="en-US"/>
               <a:t>9</a:t>

--- a/dist/초1/수학/수와연산/초1_수학_수와연산_03_가르기와모으기_학생용.pptx
+++ b/dist/초1/수학/수와연산/초1_수학_수와연산_03_가르기와모으기_학생용.pptx
@@ -120,13 +120,13 @@
   <p:extLst>
     <p:ext uri="{521415D9-36F7-43E2-AB2F-B90AF26B5E84}">
       <p14:sectionLst xmlns:p14="http://schemas.microsoft.com/office/powerpoint/2010/main">
-        <p14:section name="도입" id="{4df72ecc-e36a-32ad-5c68-ebdb6736a841}">
+        <p14:section name="도입" id="{5ddbfdc5-b286-306f-bafc-5788e0482e35}">
           <p14:sldIdLst>
             <p14:sldId id="256"/>
             <p14:sldId id="257"/>
           </p14:sldIdLst>
         </p14:section>
-        <p14:section name="개념" id="{7d61c654-48a3-571a-29f5-26fe0d0033f9}">
+        <p14:section name="개념" id="{8f45c898-94aa-6082-60fa-16d3cd97821f}">
           <p14:sldIdLst>
             <p14:sldId id="258"/>
             <p14:sldId id="259"/>
@@ -135,25 +135,25 @@
             <p14:sldId id="262"/>
           </p14:sldIdLst>
         </p14:section>
-        <p14:section name="연습" id="{711a68d7-1765-2d42-4f5c-1848993b8526}">
+        <p14:section name="연습" id="{b31c8210-fffc-e84a-ffd9-74cf72efeef9}">
           <p14:sldIdLst>
             <p14:sldId id="263"/>
             <p14:sldId id="264"/>
             <p14:sldId id="265"/>
           </p14:sldIdLst>
         </p14:section>
-        <p14:section name="확인" id="{a1de9d88-a30b-b18a-2ff5-c62b963a18bc}">
+        <p14:section name="확인" id="{98abbb2a-5a3c-fb32-77da-5313ee2fe68b}">
           <p14:sldIdLst>
             <p14:sldId id="266"/>
             <p14:sldId id="267"/>
           </p14:sldIdLst>
         </p14:section>
-        <p14:section name="정리" id="{4ab34a1a-04e4-b8b8-ef57-4311e96d1d3b}">
+        <p14:section name="정리" id="{c0d0d9b3-7edc-7ebf-abb8-e94b2d9b7ad2}">
           <p14:sldIdLst>
             <p14:sldId id="268"/>
           </p14:sldIdLst>
         </p14:section>
-        <p14:section name="보충" id="{b096471c-73b3-6aae-e3fc-a3dda9fcfa82}">
+        <p14:section name="보충" id="{87cde719-f761-120a-cc9b-41852319a412}">
           <p14:sldIdLst>
             <p14:sldId id="269"/>
           </p14:sldIdLst>
@@ -6270,7 +6270,7 @@
         </p:nvSpPr>
         <p:spPr>
           <a:xfrm>
-            <a:off x="548640" y="1773936"/>
+            <a:off x="548640" y="1796796"/>
             <a:ext cx="566928" cy="566928"/>
           </a:xfrm>
           <a:prstGeom prst="roundRect">
@@ -6317,8 +6317,8 @@
         </p:nvSpPr>
         <p:spPr>
           <a:xfrm>
-            <a:off x="1618488" y="1325880"/>
-            <a:ext cx="731520" cy="731520"/>
+            <a:off x="2201418" y="1325880"/>
+            <a:ext cx="754380" cy="754380"/>
           </a:xfrm>
           <a:prstGeom prst="rect">
             <a:avLst/>
@@ -6342,8 +6342,8 @@
         </p:nvSpPr>
         <p:spPr>
           <a:xfrm>
-            <a:off x="1742846" y="1450238"/>
-            <a:ext cx="482803" cy="482803"/>
+            <a:off x="2329663" y="1454125"/>
+            <a:ext cx="497891" cy="497891"/>
           </a:xfrm>
           <a:prstGeom prst="ellipse">
             <a:avLst/>
@@ -6367,8 +6367,8 @@
         </p:nvSpPr>
         <p:spPr>
           <a:xfrm>
-            <a:off x="2350008" y="1325880"/>
-            <a:ext cx="731520" cy="731520"/>
+            <a:off x="2955798" y="1325880"/>
+            <a:ext cx="754380" cy="754380"/>
           </a:xfrm>
           <a:prstGeom prst="rect">
             <a:avLst/>
@@ -6392,8 +6392,8 @@
         </p:nvSpPr>
         <p:spPr>
           <a:xfrm>
-            <a:off x="2474366" y="1450238"/>
-            <a:ext cx="482803" cy="482803"/>
+            <a:off x="3084043" y="1454125"/>
+            <a:ext cx="497891" cy="497891"/>
           </a:xfrm>
           <a:prstGeom prst="ellipse">
             <a:avLst/>
@@ -6417,8 +6417,8 @@
         </p:nvSpPr>
         <p:spPr>
           <a:xfrm>
-            <a:off x="3081528" y="1325880"/>
-            <a:ext cx="731520" cy="731520"/>
+            <a:off x="3710178" y="1325880"/>
+            <a:ext cx="754380" cy="754380"/>
           </a:xfrm>
           <a:prstGeom prst="rect">
             <a:avLst/>
@@ -6442,8 +6442,8 @@
         </p:nvSpPr>
         <p:spPr>
           <a:xfrm>
-            <a:off x="3205886" y="1450238"/>
-            <a:ext cx="482803" cy="482803"/>
+            <a:off x="3838423" y="1454125"/>
+            <a:ext cx="497891" cy="497891"/>
           </a:xfrm>
           <a:prstGeom prst="ellipse">
             <a:avLst/>
@@ -6467,8 +6467,8 @@
         </p:nvSpPr>
         <p:spPr>
           <a:xfrm>
-            <a:off x="3813048" y="1325880"/>
-            <a:ext cx="731520" cy="731520"/>
+            <a:off x="4464558" y="1325880"/>
+            <a:ext cx="754380" cy="754380"/>
           </a:xfrm>
           <a:prstGeom prst="rect">
             <a:avLst/>
@@ -6492,8 +6492,8 @@
         </p:nvSpPr>
         <p:spPr>
           <a:xfrm>
-            <a:off x="3937406" y="1450238"/>
-            <a:ext cx="482803" cy="482803"/>
+            <a:off x="4592803" y="1454125"/>
+            <a:ext cx="497891" cy="497891"/>
           </a:xfrm>
           <a:prstGeom prst="ellipse">
             <a:avLst/>
@@ -6517,8 +6517,8 @@
         </p:nvSpPr>
         <p:spPr>
           <a:xfrm>
-            <a:off x="4544568" y="1325880"/>
-            <a:ext cx="731520" cy="731520"/>
+            <a:off x="5218938" y="1325880"/>
+            <a:ext cx="754380" cy="754380"/>
           </a:xfrm>
           <a:prstGeom prst="rect">
             <a:avLst/>
@@ -6542,8 +6542,8 @@
         </p:nvSpPr>
         <p:spPr>
           <a:xfrm>
-            <a:off x="4668926" y="1450238"/>
-            <a:ext cx="482803" cy="482803"/>
+            <a:off x="5347183" y="1454125"/>
+            <a:ext cx="497891" cy="497891"/>
           </a:xfrm>
           <a:prstGeom prst="ellipse">
             <a:avLst/>
@@ -6567,8 +6567,8 @@
         </p:nvSpPr>
         <p:spPr>
           <a:xfrm>
-            <a:off x="1618488" y="2057400"/>
-            <a:ext cx="731520" cy="731520"/>
+            <a:off x="2201418" y="2080260"/>
+            <a:ext cx="754380" cy="754380"/>
           </a:xfrm>
           <a:prstGeom prst="rect">
             <a:avLst/>
@@ -6592,8 +6592,8 @@
         </p:nvSpPr>
         <p:spPr>
           <a:xfrm>
-            <a:off x="1742846" y="2181758"/>
-            <a:ext cx="482803" cy="482803"/>
+            <a:off x="2329663" y="2208505"/>
+            <a:ext cx="497891" cy="497891"/>
           </a:xfrm>
           <a:prstGeom prst="ellipse">
             <a:avLst/>
@@ -6617,8 +6617,8 @@
         </p:nvSpPr>
         <p:spPr>
           <a:xfrm>
-            <a:off x="2350008" y="2057400"/>
-            <a:ext cx="731520" cy="731520"/>
+            <a:off x="2955798" y="2080260"/>
+            <a:ext cx="754380" cy="754380"/>
           </a:xfrm>
           <a:prstGeom prst="rect">
             <a:avLst/>
@@ -6642,8 +6642,8 @@
         </p:nvSpPr>
         <p:spPr>
           <a:xfrm>
-            <a:off x="2474366" y="2181758"/>
-            <a:ext cx="482803" cy="482803"/>
+            <a:off x="3084043" y="2208505"/>
+            <a:ext cx="497891" cy="497891"/>
           </a:xfrm>
           <a:prstGeom prst="ellipse">
             <a:avLst/>
@@ -6667,8 +6667,8 @@
         </p:nvSpPr>
         <p:spPr>
           <a:xfrm>
-            <a:off x="3081528" y="2057400"/>
-            <a:ext cx="731520" cy="731520"/>
+            <a:off x="3710178" y="2080260"/>
+            <a:ext cx="754380" cy="754380"/>
           </a:xfrm>
           <a:prstGeom prst="rect">
             <a:avLst/>
@@ -6692,8 +6692,8 @@
         </p:nvSpPr>
         <p:spPr>
           <a:xfrm>
-            <a:off x="3205886" y="2181758"/>
-            <a:ext cx="482803" cy="482803"/>
+            <a:off x="3838423" y="2208505"/>
+            <a:ext cx="497891" cy="497891"/>
           </a:xfrm>
           <a:prstGeom prst="ellipse">
             <a:avLst/>
@@ -6717,8 +6717,8 @@
         </p:nvSpPr>
         <p:spPr>
           <a:xfrm>
-            <a:off x="3813048" y="2057400"/>
-            <a:ext cx="731520" cy="731520"/>
+            <a:off x="4464558" y="2080260"/>
+            <a:ext cx="754380" cy="754380"/>
           </a:xfrm>
           <a:prstGeom prst="rect">
             <a:avLst/>
@@ -6742,8 +6742,8 @@
         </p:nvSpPr>
         <p:spPr>
           <a:xfrm>
-            <a:off x="4544568" y="2057400"/>
-            <a:ext cx="731520" cy="731520"/>
+            <a:off x="5218938" y="2080260"/>
+            <a:ext cx="754380" cy="754380"/>
           </a:xfrm>
           <a:prstGeom prst="rect">
             <a:avLst/>
@@ -6767,8 +6767,8 @@
         </p:nvSpPr>
         <p:spPr>
           <a:xfrm>
-            <a:off x="1618488" y="1325880"/>
-            <a:ext cx="3657600" cy="1463040"/>
+            <a:off x="2201418" y="1325880"/>
+            <a:ext cx="3771900" cy="1508760"/>
           </a:xfrm>
           <a:prstGeom prst="rect">
             <a:avLst/>
@@ -10701,7 +10701,7 @@
         </p:nvSpPr>
         <p:spPr>
           <a:xfrm>
-            <a:off x="548640" y="1773936"/>
+            <a:off x="548640" y="1945386"/>
             <a:ext cx="566928" cy="566928"/>
           </a:xfrm>
           <a:prstGeom prst="roundRect">
@@ -10749,7 +10749,7 @@
         <p:spPr>
           <a:xfrm>
             <a:off x="1344168" y="1325880"/>
-            <a:ext cx="4206240" cy="1463040"/>
+            <a:ext cx="4567428" cy="1805940"/>
           </a:xfrm>
           <a:prstGeom prst="rect">
             <a:avLst/>
@@ -10765,7 +10765,7 @@
               <a:buNone/>
             </a:pPr>
             <a:r>
-              <a:rPr lang="ko-KR" altLang="en-US" sz="2600" b="1" dirty="0">
+              <a:rPr lang="ko-KR" altLang="en-US" sz="3600" b="1" dirty="0">
                 <a:solidFill>
                   <a:srgbClr val="1F2937"/>
                 </a:solidFill>
@@ -10775,14 +10775,14 @@
               </a:rPr>
               <a:t>6</a:t>
             </a:r>
-            <a:endParaRPr lang="ko-KR" sz="2600" dirty="0"/>
+            <a:endParaRPr lang="ko-KR" sz="3600" dirty="0"/>
           </a:p>
           <a:p>
             <a:pPr eaLnBrk="0" algn="ctr" indent="0" marL="0">
               <a:buNone/>
             </a:pPr>
             <a:r>
-              <a:rPr lang="ko-KR" altLang="en-US" sz="2600" b="1" dirty="0">
+              <a:rPr lang="ko-KR" altLang="en-US" sz="3600" b="1" dirty="0">
                 <a:solidFill>
                   <a:srgbClr val="1F2937"/>
                 </a:solidFill>
@@ -10792,14 +10792,14 @@
               </a:rPr>
               <a:t>↙    ↘</a:t>
             </a:r>
-            <a:endParaRPr lang="ko-KR" sz="2600" dirty="0"/>
+            <a:endParaRPr lang="ko-KR" sz="3600" dirty="0"/>
           </a:p>
           <a:p>
             <a:pPr eaLnBrk="0" algn="ctr" indent="0" marL="0">
               <a:buNone/>
             </a:pPr>
             <a:r>
-              <a:rPr lang="ko-KR" altLang="en-US" sz="2600" b="1" dirty="0">
+              <a:rPr lang="ko-KR" altLang="en-US" sz="3600" b="1" dirty="0">
                 <a:solidFill>
                   <a:srgbClr val="1F2937"/>
                 </a:solidFill>
@@ -10809,7 +10809,7 @@
               </a:rPr>
               <a:t>2        □</a:t>
             </a:r>
-            <a:endParaRPr lang="ko-KR" sz="2600" dirty="0"/>
+            <a:endParaRPr lang="ko-KR" sz="3600" dirty="0"/>
           </a:p>
         </p:txBody>
       </p:sp>
@@ -10821,7 +10821,7 @@
         </p:nvSpPr>
         <p:spPr>
           <a:xfrm>
-            <a:off x="6277356" y="1773936"/>
+            <a:off x="6277356" y="1945386"/>
             <a:ext cx="566928" cy="566928"/>
           </a:xfrm>
           <a:prstGeom prst="roundRect">
@@ -10869,7 +10869,7 @@
         <p:spPr>
           <a:xfrm>
             <a:off x="7072884" y="1325880"/>
-            <a:ext cx="4206240" cy="1463040"/>
+            <a:ext cx="4567428" cy="1805940"/>
           </a:xfrm>
           <a:prstGeom prst="rect">
             <a:avLst/>
@@ -10885,7 +10885,7 @@
               <a:buNone/>
             </a:pPr>
             <a:r>
-              <a:rPr lang="ko-KR" altLang="en-US" sz="2600" b="1" dirty="0">
+              <a:rPr lang="ko-KR" altLang="en-US" sz="3600" b="1" dirty="0">
                 <a:solidFill>
                   <a:srgbClr val="1F2937"/>
                 </a:solidFill>
@@ -10895,14 +10895,14 @@
               </a:rPr>
               <a:t>8</a:t>
             </a:r>
-            <a:endParaRPr lang="ko-KR" sz="2600" dirty="0"/>
+            <a:endParaRPr lang="ko-KR" sz="3600" dirty="0"/>
           </a:p>
           <a:p>
             <a:pPr eaLnBrk="0" algn="ctr" indent="0" marL="0">
               <a:buNone/>
             </a:pPr>
             <a:r>
-              <a:rPr lang="ko-KR" altLang="en-US" sz="2600" b="1" dirty="0">
+              <a:rPr lang="ko-KR" altLang="en-US" sz="3600" b="1" dirty="0">
                 <a:solidFill>
                   <a:srgbClr val="1F2937"/>
                 </a:solidFill>
@@ -10912,14 +10912,14 @@
               </a:rPr>
               <a:t>↙    ↘</a:t>
             </a:r>
-            <a:endParaRPr lang="ko-KR" sz="2600" dirty="0"/>
+            <a:endParaRPr lang="ko-KR" sz="3600" dirty="0"/>
           </a:p>
           <a:p>
             <a:pPr eaLnBrk="0" algn="ctr" indent="0" marL="0">
               <a:buNone/>
             </a:pPr>
             <a:r>
-              <a:rPr lang="ko-KR" altLang="en-US" sz="2600" b="1" dirty="0">
+              <a:rPr lang="ko-KR" altLang="en-US" sz="3600" b="1" dirty="0">
                 <a:solidFill>
                   <a:srgbClr val="1F2937"/>
                 </a:solidFill>
@@ -10929,7 +10929,7 @@
               </a:rPr>
               <a:t>□        5</a:t>
             </a:r>
-            <a:endParaRPr lang="ko-KR" sz="2600" dirty="0"/>
+            <a:endParaRPr lang="ko-KR" sz="3600" dirty="0"/>
           </a:p>
         </p:txBody>
       </p:sp>
@@ -10941,7 +10941,7 @@
         </p:nvSpPr>
         <p:spPr>
           <a:xfrm>
-            <a:off x="548640" y="3762756"/>
+            <a:off x="548640" y="3934206"/>
             <a:ext cx="566928" cy="566928"/>
           </a:xfrm>
           <a:prstGeom prst="roundRect">
@@ -10989,7 +10989,7 @@
         <p:spPr>
           <a:xfrm>
             <a:off x="1344168" y="3314700"/>
-            <a:ext cx="4206240" cy="1463040"/>
+            <a:ext cx="4567428" cy="1805940"/>
           </a:xfrm>
           <a:prstGeom prst="rect">
             <a:avLst/>
@@ -11005,7 +11005,7 @@
               <a:buNone/>
             </a:pPr>
             <a:r>
-              <a:rPr lang="ko-KR" altLang="en-US" sz="2600" b="1" dirty="0">
+              <a:rPr lang="ko-KR" altLang="en-US" sz="3600" b="1" dirty="0">
                 <a:solidFill>
                   <a:srgbClr val="1F2937"/>
                 </a:solidFill>
@@ -11015,14 +11015,14 @@
               </a:rPr>
               <a:t>9</a:t>
             </a:r>
-            <a:endParaRPr lang="ko-KR" sz="2600" dirty="0"/>
+            <a:endParaRPr lang="ko-KR" sz="3600" dirty="0"/>
           </a:p>
           <a:p>
             <a:pPr eaLnBrk="0" algn="ctr" indent="0" marL="0">
               <a:buNone/>
             </a:pPr>
             <a:r>
-              <a:rPr lang="ko-KR" altLang="en-US" sz="2600" b="1" dirty="0">
+              <a:rPr lang="ko-KR" altLang="en-US" sz="3600" b="1" dirty="0">
                 <a:solidFill>
                   <a:srgbClr val="1F2937"/>
                 </a:solidFill>
@@ -11032,14 +11032,14 @@
               </a:rPr>
               <a:t>↙    ↘</a:t>
             </a:r>
-            <a:endParaRPr lang="ko-KR" sz="2600" dirty="0"/>
+            <a:endParaRPr lang="ko-KR" sz="3600" dirty="0"/>
           </a:p>
           <a:p>
             <a:pPr eaLnBrk="0" algn="ctr" indent="0" marL="0">
               <a:buNone/>
             </a:pPr>
             <a:r>
-              <a:rPr lang="ko-KR" altLang="en-US" sz="2600" b="1" dirty="0">
+              <a:rPr lang="ko-KR" altLang="en-US" sz="3600" b="1" dirty="0">
                 <a:solidFill>
                   <a:srgbClr val="1F2937"/>
                 </a:solidFill>
@@ -11049,7 +11049,7 @@
               </a:rPr>
               <a:t>4        □</a:t>
             </a:r>
-            <a:endParaRPr lang="ko-KR" sz="2600" dirty="0"/>
+            <a:endParaRPr lang="ko-KR" sz="3600" dirty="0"/>
           </a:p>
         </p:txBody>
       </p:sp>
@@ -11061,7 +11061,7 @@
         </p:nvSpPr>
         <p:spPr>
           <a:xfrm>
-            <a:off x="6277356" y="3762756"/>
+            <a:off x="6277356" y="3934206"/>
             <a:ext cx="566928" cy="566928"/>
           </a:xfrm>
           <a:prstGeom prst="roundRect">
@@ -11109,7 +11109,7 @@
         <p:spPr>
           <a:xfrm>
             <a:off x="7072884" y="3314700"/>
-            <a:ext cx="4206240" cy="1463040"/>
+            <a:ext cx="4567428" cy="1805940"/>
           </a:xfrm>
           <a:prstGeom prst="rect">
             <a:avLst/>
@@ -11125,7 +11125,7 @@
               <a:buNone/>
             </a:pPr>
             <a:r>
-              <a:rPr lang="ko-KR" altLang="en-US" sz="2600" b="1" dirty="0">
+              <a:rPr lang="ko-KR" altLang="en-US" sz="3600" b="1" dirty="0">
                 <a:solidFill>
                   <a:srgbClr val="1F2937"/>
                 </a:solidFill>
@@ -11135,14 +11135,14 @@
               </a:rPr>
               <a:t>10</a:t>
             </a:r>
-            <a:endParaRPr lang="ko-KR" sz="2600" dirty="0"/>
+            <a:endParaRPr lang="ko-KR" sz="3600" dirty="0"/>
           </a:p>
           <a:p>
             <a:pPr eaLnBrk="0" algn="ctr" indent="0" marL="0">
               <a:buNone/>
             </a:pPr>
             <a:r>
-              <a:rPr lang="ko-KR" altLang="en-US" sz="2600" b="1" dirty="0">
+              <a:rPr lang="ko-KR" altLang="en-US" sz="3600" b="1" dirty="0">
                 <a:solidFill>
                   <a:srgbClr val="1F2937"/>
                 </a:solidFill>
@@ -11152,14 +11152,14 @@
               </a:rPr>
               <a:t>↙    ↘</a:t>
             </a:r>
-            <a:endParaRPr lang="ko-KR" sz="2600" dirty="0"/>
+            <a:endParaRPr lang="ko-KR" sz="3600" dirty="0"/>
           </a:p>
           <a:p>
             <a:pPr eaLnBrk="0" algn="ctr" indent="0" marL="0">
               <a:buNone/>
             </a:pPr>
             <a:r>
-              <a:rPr lang="ko-KR" altLang="en-US" sz="2600" b="1" dirty="0">
+              <a:rPr lang="ko-KR" altLang="en-US" sz="3600" b="1" dirty="0">
                 <a:solidFill>
                   <a:srgbClr val="1F2937"/>
                 </a:solidFill>
@@ -11169,7 +11169,7 @@
               </a:rPr>
               <a:t>7        □</a:t>
             </a:r>
-            <a:endParaRPr lang="ko-KR" sz="2600" dirty="0"/>
+            <a:endParaRPr lang="ko-KR" sz="3600" dirty="0"/>
           </a:p>
         </p:txBody>
       </p:sp>
@@ -11364,7 +11364,7 @@
         </p:nvSpPr>
         <p:spPr>
           <a:xfrm>
-            <a:off x="548640" y="1773936"/>
+            <a:off x="548640" y="1945386"/>
             <a:ext cx="566928" cy="566928"/>
           </a:xfrm>
           <a:prstGeom prst="roundRect">
@@ -11412,7 +11412,7 @@
         <p:spPr>
           <a:xfrm>
             <a:off x="1344168" y="1325880"/>
-            <a:ext cx="4206240" cy="1463040"/>
+            <a:ext cx="4567428" cy="1805940"/>
           </a:xfrm>
           <a:prstGeom prst="rect">
             <a:avLst/>
@@ -11428,7 +11428,7 @@
               <a:buNone/>
             </a:pPr>
             <a:r>
-              <a:rPr lang="ko-KR" altLang="en-US" sz="2600" b="1" dirty="0">
+              <a:rPr lang="ko-KR" altLang="en-US" sz="3600" b="1" dirty="0">
                 <a:solidFill>
                   <a:srgbClr val="1F2937"/>
                 </a:solidFill>
@@ -11438,14 +11438,14 @@
               </a:rPr>
               <a:t>2        5</a:t>
             </a:r>
-            <a:endParaRPr lang="ko-KR" sz="2600" dirty="0"/>
+            <a:endParaRPr lang="ko-KR" sz="3600" dirty="0"/>
           </a:p>
           <a:p>
             <a:pPr eaLnBrk="0" algn="ctr" indent="0" marL="0">
               <a:buNone/>
             </a:pPr>
             <a:r>
-              <a:rPr lang="ko-KR" altLang="en-US" sz="2600" b="1" dirty="0">
+              <a:rPr lang="ko-KR" altLang="en-US" sz="3600" b="1" dirty="0">
                 <a:solidFill>
                   <a:srgbClr val="1F2937"/>
                 </a:solidFill>
@@ -11455,14 +11455,14 @@
               </a:rPr>
               <a:t>↘    ↙</a:t>
             </a:r>
-            <a:endParaRPr lang="ko-KR" sz="2600" dirty="0"/>
+            <a:endParaRPr lang="ko-KR" sz="3600" dirty="0"/>
           </a:p>
           <a:p>
             <a:pPr eaLnBrk="0" algn="ctr" indent="0" marL="0">
               <a:buNone/>
             </a:pPr>
             <a:r>
-              <a:rPr lang="ko-KR" altLang="en-US" sz="2600" b="1" dirty="0">
+              <a:rPr lang="ko-KR" altLang="en-US" sz="3600" b="1" dirty="0">
                 <a:solidFill>
                   <a:srgbClr val="1F2937"/>
                 </a:solidFill>
@@ -11472,7 +11472,7 @@
               </a:rPr>
               <a:t>□</a:t>
             </a:r>
-            <a:endParaRPr lang="ko-KR" sz="2600" dirty="0"/>
+            <a:endParaRPr lang="ko-KR" sz="3600" dirty="0"/>
           </a:p>
         </p:txBody>
       </p:sp>
@@ -11484,7 +11484,7 @@
         </p:nvSpPr>
         <p:spPr>
           <a:xfrm>
-            <a:off x="6277356" y="1773936"/>
+            <a:off x="6277356" y="1945386"/>
             <a:ext cx="566928" cy="566928"/>
           </a:xfrm>
           <a:prstGeom prst="roundRect">
@@ -11532,7 +11532,7 @@
         <p:spPr>
           <a:xfrm>
             <a:off x="7072884" y="1325880"/>
-            <a:ext cx="4206240" cy="1463040"/>
+            <a:ext cx="4567428" cy="1805940"/>
           </a:xfrm>
           <a:prstGeom prst="rect">
             <a:avLst/>
@@ -11548,7 +11548,7 @@
               <a:buNone/>
             </a:pPr>
             <a:r>
-              <a:rPr lang="ko-KR" altLang="en-US" sz="2600" b="1" dirty="0">
+              <a:rPr lang="ko-KR" altLang="en-US" sz="3600" b="1" dirty="0">
                 <a:solidFill>
                   <a:srgbClr val="1F2937"/>
                 </a:solidFill>
@@ -11558,14 +11558,14 @@
               </a:rPr>
               <a:t>4        4</a:t>
             </a:r>
-            <a:endParaRPr lang="ko-KR" sz="2600" dirty="0"/>
+            <a:endParaRPr lang="ko-KR" sz="3600" dirty="0"/>
           </a:p>
           <a:p>
             <a:pPr eaLnBrk="0" algn="ctr" indent="0" marL="0">
               <a:buNone/>
             </a:pPr>
             <a:r>
-              <a:rPr lang="ko-KR" altLang="en-US" sz="2600" b="1" dirty="0">
+              <a:rPr lang="ko-KR" altLang="en-US" sz="3600" b="1" dirty="0">
                 <a:solidFill>
                   <a:srgbClr val="1F2937"/>
                 </a:solidFill>
@@ -11575,14 +11575,14 @@
               </a:rPr>
               <a:t>↘    ↙</a:t>
             </a:r>
-            <a:endParaRPr lang="ko-KR" sz="2600" dirty="0"/>
+            <a:endParaRPr lang="ko-KR" sz="3600" dirty="0"/>
           </a:p>
           <a:p>
             <a:pPr eaLnBrk="0" algn="ctr" indent="0" marL="0">
               <a:buNone/>
             </a:pPr>
             <a:r>
-              <a:rPr lang="ko-KR" altLang="en-US" sz="2600" b="1" dirty="0">
+              <a:rPr lang="ko-KR" altLang="en-US" sz="3600" b="1" dirty="0">
                 <a:solidFill>
                   <a:srgbClr val="1F2937"/>
                 </a:solidFill>
@@ -11592,7 +11592,7 @@
               </a:rPr>
               <a:t>□</a:t>
             </a:r>
-            <a:endParaRPr lang="ko-KR" sz="2600" dirty="0"/>
+            <a:endParaRPr lang="ko-KR" sz="3600" dirty="0"/>
           </a:p>
         </p:txBody>
       </p:sp>
@@ -11604,7 +11604,7 @@
         </p:nvSpPr>
         <p:spPr>
           <a:xfrm>
-            <a:off x="548640" y="3762756"/>
+            <a:off x="548640" y="3934206"/>
             <a:ext cx="566928" cy="566928"/>
           </a:xfrm>
           <a:prstGeom prst="roundRect">
@@ -11652,7 +11652,7 @@
         <p:spPr>
           <a:xfrm>
             <a:off x="1344168" y="3314700"/>
-            <a:ext cx="4206240" cy="1463040"/>
+            <a:ext cx="4567428" cy="1805940"/>
           </a:xfrm>
           <a:prstGeom prst="rect">
             <a:avLst/>
@@ -11668,7 +11668,7 @@
               <a:buNone/>
             </a:pPr>
             <a:r>
-              <a:rPr lang="ko-KR" altLang="en-US" sz="2600" b="1" dirty="0">
+              <a:rPr lang="ko-KR" altLang="en-US" sz="3600" b="1" dirty="0">
                 <a:solidFill>
                   <a:srgbClr val="1F2937"/>
                 </a:solidFill>
@@ -11678,14 +11678,14 @@
               </a:rPr>
               <a:t>6        3</a:t>
             </a:r>
-            <a:endParaRPr lang="ko-KR" sz="2600" dirty="0"/>
+            <a:endParaRPr lang="ko-KR" sz="3600" dirty="0"/>
           </a:p>
           <a:p>
             <a:pPr eaLnBrk="0" algn="ctr" indent="0" marL="0">
               <a:buNone/>
             </a:pPr>
             <a:r>
-              <a:rPr lang="ko-KR" altLang="en-US" sz="2600" b="1" dirty="0">
+              <a:rPr lang="ko-KR" altLang="en-US" sz="3600" b="1" dirty="0">
                 <a:solidFill>
                   <a:srgbClr val="1F2937"/>
                 </a:solidFill>
@@ -11695,14 +11695,14 @@
               </a:rPr>
               <a:t>↘    ↙</a:t>
             </a:r>
-            <a:endParaRPr lang="ko-KR" sz="2600" dirty="0"/>
+            <a:endParaRPr lang="ko-KR" sz="3600" dirty="0"/>
           </a:p>
           <a:p>
             <a:pPr eaLnBrk="0" algn="ctr" indent="0" marL="0">
               <a:buNone/>
             </a:pPr>
             <a:r>
-              <a:rPr lang="ko-KR" altLang="en-US" sz="2600" b="1" dirty="0">
+              <a:rPr lang="ko-KR" altLang="en-US" sz="3600" b="1" dirty="0">
                 <a:solidFill>
                   <a:srgbClr val="1F2937"/>
                 </a:solidFill>
@@ -11712,7 +11712,7 @@
               </a:rPr>
               <a:t>□</a:t>
             </a:r>
-            <a:endParaRPr lang="ko-KR" sz="2600" dirty="0"/>
+            <a:endParaRPr lang="ko-KR" sz="3600" dirty="0"/>
           </a:p>
         </p:txBody>
       </p:sp>
@@ -11724,7 +11724,7 @@
         </p:nvSpPr>
         <p:spPr>
           <a:xfrm>
-            <a:off x="6277356" y="3762756"/>
+            <a:off x="6277356" y="3934206"/>
             <a:ext cx="566928" cy="566928"/>
           </a:xfrm>
           <a:prstGeom prst="roundRect">
@@ -11772,7 +11772,7 @@
         <p:spPr>
           <a:xfrm>
             <a:off x="7072884" y="3314700"/>
-            <a:ext cx="4206240" cy="1463040"/>
+            <a:ext cx="4567428" cy="1805940"/>
           </a:xfrm>
           <a:prstGeom prst="rect">
             <a:avLst/>
@@ -11788,7 +11788,7 @@
               <a:buNone/>
             </a:pPr>
             <a:r>
-              <a:rPr lang="ko-KR" altLang="en-US" sz="2600" b="1" dirty="0">
+              <a:rPr lang="ko-KR" altLang="en-US" sz="3600" b="1" dirty="0">
                 <a:solidFill>
                   <a:srgbClr val="1F2937"/>
                 </a:solidFill>
@@ -11798,14 +11798,14 @@
               </a:rPr>
               <a:t>5        5</a:t>
             </a:r>
-            <a:endParaRPr lang="ko-KR" sz="2600" dirty="0"/>
+            <a:endParaRPr lang="ko-KR" sz="3600" dirty="0"/>
           </a:p>
           <a:p>
             <a:pPr eaLnBrk="0" algn="ctr" indent="0" marL="0">
               <a:buNone/>
             </a:pPr>
             <a:r>
-              <a:rPr lang="ko-KR" altLang="en-US" sz="2600" b="1" dirty="0">
+              <a:rPr lang="ko-KR" altLang="en-US" sz="3600" b="1" dirty="0">
                 <a:solidFill>
                   <a:srgbClr val="1F2937"/>
                 </a:solidFill>
@@ -11815,14 +11815,14 @@
               </a:rPr>
               <a:t>↘    ↙</a:t>
             </a:r>
-            <a:endParaRPr lang="ko-KR" sz="2600" dirty="0"/>
+            <a:endParaRPr lang="ko-KR" sz="3600" dirty="0"/>
           </a:p>
           <a:p>
             <a:pPr eaLnBrk="0" algn="ctr" indent="0" marL="0">
               <a:buNone/>
             </a:pPr>
             <a:r>
-              <a:rPr lang="ko-KR" altLang="en-US" sz="2600" b="1" dirty="0">
+              <a:rPr lang="ko-KR" altLang="en-US" sz="3600" b="1" dirty="0">
                 <a:solidFill>
                   <a:srgbClr val="1F2937"/>
                 </a:solidFill>
@@ -11832,7 +11832,7 @@
               </a:rPr>
               <a:t>□</a:t>
             </a:r>
-            <a:endParaRPr lang="ko-KR" sz="2600" dirty="0"/>
+            <a:endParaRPr lang="ko-KR" sz="3600" dirty="0"/>
           </a:p>
         </p:txBody>
       </p:sp>

--- a/dist/초1/수학/수와연산/초1_수학_수와연산_03_가르기와모으기_학생용.pptx
+++ b/dist/초1/수학/수와연산/초1_수학_수와연산_03_가르기와모으기_학생용.pptx
@@ -120,13 +120,13 @@
   <p:extLst>
     <p:ext uri="{521415D9-36F7-43E2-AB2F-B90AF26B5E84}">
       <p14:sectionLst xmlns:p14="http://schemas.microsoft.com/office/powerpoint/2010/main">
-        <p14:section name="도입" id="{5ddbfdc5-b286-306f-bafc-5788e0482e35}">
+        <p14:section name="도입" id="{acb4bc24-75e8-fa16-9272-929c3f68c8db}">
           <p14:sldIdLst>
             <p14:sldId id="256"/>
             <p14:sldId id="257"/>
           </p14:sldIdLst>
         </p14:section>
-        <p14:section name="개념" id="{8f45c898-94aa-6082-60fa-16d3cd97821f}">
+        <p14:section name="개념" id="{ca6fdb88-44b9-0b40-baf3-b93377fd6ec5}">
           <p14:sldIdLst>
             <p14:sldId id="258"/>
             <p14:sldId id="259"/>
@@ -135,25 +135,25 @@
             <p14:sldId id="262"/>
           </p14:sldIdLst>
         </p14:section>
-        <p14:section name="연습" id="{b31c8210-fffc-e84a-ffd9-74cf72efeef9}">
+        <p14:section name="연습" id="{9e4bd046-b53c-3ac7-bf67-d22c58a40509}">
           <p14:sldIdLst>
             <p14:sldId id="263"/>
             <p14:sldId id="264"/>
             <p14:sldId id="265"/>
           </p14:sldIdLst>
         </p14:section>
-        <p14:section name="확인" id="{98abbb2a-5a3c-fb32-77da-5313ee2fe68b}">
+        <p14:section name="확인" id="{48fae718-292c-ed1d-14c8-c65e43c1429c}">
           <p14:sldIdLst>
             <p14:sldId id="266"/>
             <p14:sldId id="267"/>
           </p14:sldIdLst>
         </p14:section>
-        <p14:section name="정리" id="{c0d0d9b3-7edc-7ebf-abb8-e94b2d9b7ad2}">
+        <p14:section name="정리" id="{f6e96f62-fc93-0dd6-b922-8e090d8830fd}">
           <p14:sldIdLst>
             <p14:sldId id="268"/>
           </p14:sldIdLst>
         </p14:section>
-        <p14:section name="보충" id="{87cde719-f761-120a-cc9b-41852319a412}">
+        <p14:section name="보충" id="{91a37d2a-8f31-8505-b745-7e5ba16039da}">
           <p14:sldIdLst>
             <p14:sldId id="269"/>
           </p14:sldIdLst>
@@ -7678,7 +7678,7 @@
           </p:nvPr>
         </p:nvGraphicFramePr>
         <p:xfrm>
-          <a:off x="1979676" y="2590800"/>
+          <a:off x="1979676" y="2621280"/>
           <a:ext cx="8229600" cy="914400"/>
         </p:xfrm>
         <a:graphic>
@@ -7692,7 +7692,7 @@
                 <a:gridCol w="1481328"/>
                 <a:gridCol w="1481328"/>
               </a:tblGrid>
-              <a:tr h="650240">
+              <a:tr h="629920">
                 <a:tc>
                   <a:txBody>
                     <a:bodyPr/>
@@ -8034,7 +8034,7 @@
                   </a:tcPr>
                 </a:tc>
               </a:tr>
-              <a:tr h="650240">
+              <a:tr h="629920">
                 <a:tc>
                   <a:txBody>
                     <a:bodyPr/>
@@ -8376,7 +8376,7 @@
                   </a:tcPr>
                 </a:tc>
               </a:tr>
-              <a:tr h="650240">
+              <a:tr h="629920">
                 <a:tc>
                   <a:txBody>
                     <a:bodyPr/>
